--- a/DigSite/New Arcaism/uarm 2026 a/00 S Soames Philosophy of language chap1.pptx
+++ b/DigSite/New Arcaism/uarm 2026 a/00 S Soames Philosophy of language chap1.pptx
@@ -14,40 +14,41 @@
     <p:sldId id="263" r:id="rId8"/>
     <p:sldId id="262" r:id="rId9"/>
     <p:sldId id="264" r:id="rId10"/>
-    <p:sldId id="266" r:id="rId11"/>
-    <p:sldId id="267" r:id="rId12"/>
-    <p:sldId id="268" r:id="rId13"/>
-    <p:sldId id="269" r:id="rId14"/>
-    <p:sldId id="270" r:id="rId15"/>
-    <p:sldId id="271" r:id="rId16"/>
-    <p:sldId id="272" r:id="rId17"/>
-    <p:sldId id="273" r:id="rId18"/>
-    <p:sldId id="274" r:id="rId19"/>
-    <p:sldId id="275" r:id="rId20"/>
-    <p:sldId id="276" r:id="rId21"/>
-    <p:sldId id="277" r:id="rId22"/>
-    <p:sldId id="278" r:id="rId23"/>
-    <p:sldId id="279" r:id="rId24"/>
-    <p:sldId id="280" r:id="rId25"/>
-    <p:sldId id="281" r:id="rId26"/>
-    <p:sldId id="282" r:id="rId27"/>
-    <p:sldId id="283" r:id="rId28"/>
-    <p:sldId id="284" r:id="rId29"/>
-    <p:sldId id="285" r:id="rId30"/>
-    <p:sldId id="286" r:id="rId31"/>
-    <p:sldId id="287" r:id="rId32"/>
-    <p:sldId id="288" r:id="rId33"/>
-    <p:sldId id="289" r:id="rId34"/>
-    <p:sldId id="290" r:id="rId35"/>
-    <p:sldId id="292" r:id="rId36"/>
-    <p:sldId id="293" r:id="rId37"/>
-    <p:sldId id="294" r:id="rId38"/>
-    <p:sldId id="295" r:id="rId39"/>
-    <p:sldId id="296" r:id="rId40"/>
-    <p:sldId id="297" r:id="rId41"/>
-    <p:sldId id="298" r:id="rId42"/>
-    <p:sldId id="299" r:id="rId43"/>
-    <p:sldId id="301" r:id="rId44"/>
+    <p:sldId id="302" r:id="rId11"/>
+    <p:sldId id="266" r:id="rId12"/>
+    <p:sldId id="267" r:id="rId13"/>
+    <p:sldId id="268" r:id="rId14"/>
+    <p:sldId id="269" r:id="rId15"/>
+    <p:sldId id="270" r:id="rId16"/>
+    <p:sldId id="271" r:id="rId17"/>
+    <p:sldId id="272" r:id="rId18"/>
+    <p:sldId id="273" r:id="rId19"/>
+    <p:sldId id="274" r:id="rId20"/>
+    <p:sldId id="275" r:id="rId21"/>
+    <p:sldId id="276" r:id="rId22"/>
+    <p:sldId id="277" r:id="rId23"/>
+    <p:sldId id="278" r:id="rId24"/>
+    <p:sldId id="279" r:id="rId25"/>
+    <p:sldId id="280" r:id="rId26"/>
+    <p:sldId id="281" r:id="rId27"/>
+    <p:sldId id="282" r:id="rId28"/>
+    <p:sldId id="283" r:id="rId29"/>
+    <p:sldId id="284" r:id="rId30"/>
+    <p:sldId id="285" r:id="rId31"/>
+    <p:sldId id="286" r:id="rId32"/>
+    <p:sldId id="287" r:id="rId33"/>
+    <p:sldId id="288" r:id="rId34"/>
+    <p:sldId id="289" r:id="rId35"/>
+    <p:sldId id="290" r:id="rId36"/>
+    <p:sldId id="292" r:id="rId37"/>
+    <p:sldId id="293" r:id="rId38"/>
+    <p:sldId id="294" r:id="rId39"/>
+    <p:sldId id="295" r:id="rId40"/>
+    <p:sldId id="296" r:id="rId41"/>
+    <p:sldId id="297" r:id="rId42"/>
+    <p:sldId id="298" r:id="rId43"/>
+    <p:sldId id="299" r:id="rId44"/>
+    <p:sldId id="301" r:id="rId45"/>
   </p:sldIdLst>
   <p:sldSz cx="12192000" cy="6858000"/>
   <p:notesSz cx="6858000" cy="9144000"/>
@@ -146,6 +147,11 @@
       </a:defRPr>
     </a:lvl9pPr>
   </p:defaultTextStyle>
+  <p:extLst>
+    <p:ext uri="{EFAFB233-063F-42B5-8137-9DF3F51BA10A}">
+      <p15:sldGuideLst xmlns:p15="http://schemas.microsoft.com/office/powerpoint/2012/main"/>
+    </p:ext>
+  </p:extLst>
 </p:presentation>
 </file>
 
@@ -298,7 +304,7 @@
           <a:p>
             <a:fld id="{1637092E-6868-4AE1-9299-FB7C399E224F}" type="datetimeFigureOut">
               <a:rPr lang="es-PE" smtClean="0"/>
-              <a:t>8/05/2026</a:t>
+              <a:t>19/05/2026</a:t>
             </a:fld>
             <a:endParaRPr lang="es-PE"/>
           </a:p>
@@ -498,7 +504,7 @@
           <a:p>
             <a:fld id="{1637092E-6868-4AE1-9299-FB7C399E224F}" type="datetimeFigureOut">
               <a:rPr lang="es-PE" smtClean="0"/>
-              <a:t>8/05/2026</a:t>
+              <a:t>19/05/2026</a:t>
             </a:fld>
             <a:endParaRPr lang="es-PE"/>
           </a:p>
@@ -708,7 +714,7 @@
           <a:p>
             <a:fld id="{1637092E-6868-4AE1-9299-FB7C399E224F}" type="datetimeFigureOut">
               <a:rPr lang="es-PE" smtClean="0"/>
-              <a:t>8/05/2026</a:t>
+              <a:t>19/05/2026</a:t>
             </a:fld>
             <a:endParaRPr lang="es-PE"/>
           </a:p>
@@ -908,7 +914,7 @@
           <a:p>
             <a:fld id="{1637092E-6868-4AE1-9299-FB7C399E224F}" type="datetimeFigureOut">
               <a:rPr lang="es-PE" smtClean="0"/>
-              <a:t>8/05/2026</a:t>
+              <a:t>19/05/2026</a:t>
             </a:fld>
             <a:endParaRPr lang="es-PE"/>
           </a:p>
@@ -1184,7 +1190,7 @@
           <a:p>
             <a:fld id="{1637092E-6868-4AE1-9299-FB7C399E224F}" type="datetimeFigureOut">
               <a:rPr lang="es-PE" smtClean="0"/>
-              <a:t>8/05/2026</a:t>
+              <a:t>19/05/2026</a:t>
             </a:fld>
             <a:endParaRPr lang="es-PE"/>
           </a:p>
@@ -1452,7 +1458,7 @@
           <a:p>
             <a:fld id="{1637092E-6868-4AE1-9299-FB7C399E224F}" type="datetimeFigureOut">
               <a:rPr lang="es-PE" smtClean="0"/>
-              <a:t>8/05/2026</a:t>
+              <a:t>19/05/2026</a:t>
             </a:fld>
             <a:endParaRPr lang="es-PE"/>
           </a:p>
@@ -1867,7 +1873,7 @@
           <a:p>
             <a:fld id="{1637092E-6868-4AE1-9299-FB7C399E224F}" type="datetimeFigureOut">
               <a:rPr lang="es-PE" smtClean="0"/>
-              <a:t>8/05/2026</a:t>
+              <a:t>19/05/2026</a:t>
             </a:fld>
             <a:endParaRPr lang="es-PE"/>
           </a:p>
@@ -2009,7 +2015,7 @@
           <a:p>
             <a:fld id="{1637092E-6868-4AE1-9299-FB7C399E224F}" type="datetimeFigureOut">
               <a:rPr lang="es-PE" smtClean="0"/>
-              <a:t>8/05/2026</a:t>
+              <a:t>19/05/2026</a:t>
             </a:fld>
             <a:endParaRPr lang="es-PE"/>
           </a:p>
@@ -2122,7 +2128,7 @@
           <a:p>
             <a:fld id="{1637092E-6868-4AE1-9299-FB7C399E224F}" type="datetimeFigureOut">
               <a:rPr lang="es-PE" smtClean="0"/>
-              <a:t>8/05/2026</a:t>
+              <a:t>19/05/2026</a:t>
             </a:fld>
             <a:endParaRPr lang="es-PE"/>
           </a:p>
@@ -2435,7 +2441,7 @@
           <a:p>
             <a:fld id="{1637092E-6868-4AE1-9299-FB7C399E224F}" type="datetimeFigureOut">
               <a:rPr lang="es-PE" smtClean="0"/>
-              <a:t>8/05/2026</a:t>
+              <a:t>19/05/2026</a:t>
             </a:fld>
             <a:endParaRPr lang="es-PE"/>
           </a:p>
@@ -2724,7 +2730,7 @@
           <a:p>
             <a:fld id="{1637092E-6868-4AE1-9299-FB7C399E224F}" type="datetimeFigureOut">
               <a:rPr lang="es-PE" smtClean="0"/>
-              <a:t>8/05/2026</a:t>
+              <a:t>19/05/2026</a:t>
             </a:fld>
             <a:endParaRPr lang="es-PE"/>
           </a:p>
@@ -2967,7 +2973,7 @@
           <a:p>
             <a:fld id="{1637092E-6868-4AE1-9299-FB7C399E224F}" type="datetimeFigureOut">
               <a:rPr lang="es-PE" smtClean="0"/>
-              <a:t>8/05/2026</a:t>
+              <a:t>19/05/2026</a:t>
             </a:fld>
             <a:endParaRPr lang="es-PE"/>
           </a:p>
@@ -3488,6 +3494,259 @@
 </file>
 
 <file path=ppt/slides/slide10.xml><?xml version="1.0" encoding="utf-8"?>
+<p:sld xmlns:a="http://schemas.openxmlformats.org/drawingml/2006/main" xmlns:r="http://schemas.openxmlformats.org/officeDocument/2006/relationships" xmlns:p="http://schemas.openxmlformats.org/presentationml/2006/main">
+  <p:cSld>
+    <p:spTree>
+      <p:nvGrpSpPr>
+        <p:cNvPr id="1" name="">
+          <a:extLst>
+            <a:ext uri="{FF2B5EF4-FFF2-40B4-BE49-F238E27FC236}">
+              <a16:creationId xmlns:a16="http://schemas.microsoft.com/office/drawing/2014/main" id="{91CA1D79-DF71-9B30-BA1F-F0D40DEEB522}"/>
+            </a:ext>
+          </a:extLst>
+        </p:cNvPr>
+        <p:cNvGrpSpPr/>
+        <p:nvPr/>
+      </p:nvGrpSpPr>
+      <p:grpSpPr>
+        <a:xfrm>
+          <a:off x="0" y="0"/>
+          <a:ext cx="0" cy="0"/>
+          <a:chOff x="0" y="0"/>
+          <a:chExt cx="0" cy="0"/>
+        </a:xfrm>
+      </p:grpSpPr>
+      <p:sp>
+        <p:nvSpPr>
+          <p:cNvPr id="8" name="Rectangle 7">
+            <a:extLst>
+              <a:ext uri="{FF2B5EF4-FFF2-40B4-BE49-F238E27FC236}">
+                <a16:creationId xmlns:a16="http://schemas.microsoft.com/office/drawing/2014/main" id="{17954903-5684-FB2A-D1C7-AF6383FA42A0}"/>
+              </a:ext>
+            </a:extLst>
+          </p:cNvPr>
+          <p:cNvSpPr/>
+          <p:nvPr/>
+        </p:nvSpPr>
+        <p:spPr>
+          <a:xfrm>
+            <a:off x="3740985" y="2026367"/>
+            <a:ext cx="7628556" cy="514385"/>
+          </a:xfrm>
+          <a:prstGeom prst="rect">
+            <a:avLst/>
+          </a:prstGeom>
+          <a:solidFill>
+            <a:schemeClr val="bg1"/>
+          </a:solidFill>
+          <a:ln>
+            <a:solidFill>
+              <a:schemeClr val="bg1"/>
+            </a:solidFill>
+          </a:ln>
+        </p:spPr>
+        <p:style>
+          <a:lnRef idx="2">
+            <a:schemeClr val="accent1">
+              <a:shade val="15000"/>
+            </a:schemeClr>
+          </a:lnRef>
+          <a:fillRef idx="1">
+            <a:schemeClr val="accent1"/>
+          </a:fillRef>
+          <a:effectRef idx="0">
+            <a:schemeClr val="accent1"/>
+          </a:effectRef>
+          <a:fontRef idx="minor">
+            <a:schemeClr val="lt1"/>
+          </a:fontRef>
+        </p:style>
+        <p:txBody>
+          <a:bodyPr rtlCol="0" anchor="ctr"/>
+          <a:lstStyle/>
+          <a:p>
+            <a:pPr algn="ctr"/>
+            <a:endParaRPr lang="es-PE"/>
+          </a:p>
+        </p:txBody>
+      </p:sp>
+      <p:pic>
+        <p:nvPicPr>
+          <p:cNvPr id="10" name="Picture 9">
+            <a:extLst>
+              <a:ext uri="{FF2B5EF4-FFF2-40B4-BE49-F238E27FC236}">
+                <a16:creationId xmlns:a16="http://schemas.microsoft.com/office/drawing/2014/main" id="{A3F4B3CB-92F1-3866-DAAE-12F053210741}"/>
+              </a:ext>
+            </a:extLst>
+          </p:cNvPr>
+          <p:cNvPicPr>
+            <a:picLocks noChangeAspect="1"/>
+          </p:cNvPicPr>
+          <p:nvPr/>
+        </p:nvPicPr>
+        <p:blipFill>
+          <a:blip r:embed="rId2"/>
+          <a:stretch>
+            <a:fillRect/>
+          </a:stretch>
+        </p:blipFill>
+        <p:spPr>
+          <a:xfrm>
+            <a:off x="3319240" y="3259924"/>
+            <a:ext cx="5108870" cy="3598076"/>
+          </a:xfrm>
+          <a:prstGeom prst="rect">
+            <a:avLst/>
+          </a:prstGeom>
+        </p:spPr>
+      </p:pic>
+      <p:sp>
+        <p:nvSpPr>
+          <p:cNvPr id="3" name="TextBox 2">
+            <a:extLst>
+              <a:ext uri="{FF2B5EF4-FFF2-40B4-BE49-F238E27FC236}">
+                <a16:creationId xmlns:a16="http://schemas.microsoft.com/office/drawing/2014/main" id="{8F2D3BD9-94E2-0916-B4AB-2A5F7994DB94}"/>
+              </a:ext>
+            </a:extLst>
+          </p:cNvPr>
+          <p:cNvSpPr txBox="1"/>
+          <p:nvPr/>
+        </p:nvSpPr>
+        <p:spPr>
+          <a:xfrm>
+            <a:off x="272374" y="726391"/>
+            <a:ext cx="11692647" cy="2246769"/>
+          </a:xfrm>
+          <a:prstGeom prst="rect">
+            <a:avLst/>
+          </a:prstGeom>
+          <a:noFill/>
+        </p:spPr>
+        <p:txBody>
+          <a:bodyPr wrap="square">
+            <a:spAutoFit/>
+          </a:bodyPr>
+          <a:lstStyle/>
+          <a:p>
+            <a:r>
+              <a:rPr lang="es-MX" sz="2800" dirty="0"/>
+              <a:t>Se distingue entre </a:t>
+            </a:r>
+            <a:r>
+              <a:rPr lang="es-MX" sz="2800" dirty="0">
+                <a:solidFill>
+                  <a:srgbClr val="FF0000"/>
+                </a:solidFill>
+              </a:rPr>
+              <a:t>sentido</a:t>
+            </a:r>
+            <a:r>
+              <a:rPr lang="es-MX" sz="2800" dirty="0"/>
+              <a:t> (</a:t>
+            </a:r>
+            <a:r>
+              <a:rPr lang="es-MX" sz="2800" i="1" dirty="0"/>
+              <a:t>Sinn</a:t>
+            </a:r>
+            <a:r>
+              <a:rPr lang="es-MX" sz="2800" dirty="0"/>
+              <a:t>) y </a:t>
+            </a:r>
+            <a:r>
+              <a:rPr lang="es-MX" sz="2800" dirty="0">
+                <a:solidFill>
+                  <a:schemeClr val="accent6"/>
+                </a:solidFill>
+              </a:rPr>
+              <a:t>referencia</a:t>
+            </a:r>
+            <a:r>
+              <a:rPr lang="es-MX" sz="2800" dirty="0"/>
+              <a:t> (</a:t>
+            </a:r>
+            <a:r>
+              <a:rPr lang="es-MX" sz="2800" i="1" dirty="0" err="1"/>
+              <a:t>Bedeutung</a:t>
+            </a:r>
+            <a:r>
+              <a:rPr lang="es-MX" sz="2800" dirty="0"/>
+              <a:t>) para explicar cómo expresiones con el mismo referente pueden tener diferente valor cognitivo.</a:t>
+            </a:r>
+          </a:p>
+          <a:p>
+            <a:endParaRPr lang="es-MX" sz="2800" dirty="0"/>
+          </a:p>
+          <a:p>
+            <a:r>
+              <a:rPr lang="es-MX" sz="2800" dirty="0"/>
+              <a:t>La </a:t>
+            </a:r>
+            <a:r>
+              <a:rPr lang="es-MX" sz="2800" dirty="0">
+                <a:solidFill>
+                  <a:schemeClr val="accent6"/>
+                </a:solidFill>
+              </a:rPr>
+              <a:t>referencia</a:t>
+            </a:r>
+            <a:r>
+              <a:rPr lang="es-MX" sz="2800" dirty="0"/>
+              <a:t> es el </a:t>
+            </a:r>
+            <a:r>
+              <a:rPr lang="es-MX" sz="2800" dirty="0">
+                <a:solidFill>
+                  <a:schemeClr val="accent6"/>
+                </a:solidFill>
+              </a:rPr>
+              <a:t>objeto real denotado</a:t>
+            </a:r>
+            <a:r>
+              <a:rPr lang="es-MX" sz="2800" dirty="0"/>
+              <a:t>, mientras que el </a:t>
+            </a:r>
+            <a:r>
+              <a:rPr lang="es-MX" sz="2800" dirty="0">
+                <a:solidFill>
+                  <a:srgbClr val="FF0000"/>
+                </a:solidFill>
+              </a:rPr>
+              <a:t>sentido</a:t>
+            </a:r>
+            <a:r>
+              <a:rPr lang="es-MX" sz="2800" dirty="0"/>
+              <a:t> es el "</a:t>
+            </a:r>
+            <a:r>
+              <a:rPr lang="es-MX" sz="2800" dirty="0">
+                <a:solidFill>
+                  <a:srgbClr val="FF0000"/>
+                </a:solidFill>
+              </a:rPr>
+              <a:t>modo de presentación</a:t>
+            </a:r>
+            <a:r>
+              <a:rPr lang="es-MX" sz="2800" dirty="0"/>
+              <a:t>" de ese objeto, la información o camino que nos lleva a él.</a:t>
+            </a:r>
+            <a:endParaRPr lang="es-PE" sz="2800" dirty="0"/>
+          </a:p>
+        </p:txBody>
+      </p:sp>
+    </p:spTree>
+    <p:extLst>
+      <p:ext uri="{BB962C8B-B14F-4D97-AF65-F5344CB8AC3E}">
+        <p14:creationId xmlns:p14="http://schemas.microsoft.com/office/powerpoint/2010/main" val="1991976740"/>
+      </p:ext>
+    </p:extLst>
+  </p:cSld>
+  <p:clrMapOvr>
+    <a:masterClrMapping/>
+  </p:clrMapOvr>
+</p:sld>
+</file>
+
+<file path=ppt/slides/slide11.xml><?xml version="1.0" encoding="utf-8"?>
 <p:sld xmlns:a="http://schemas.openxmlformats.org/drawingml/2006/main" xmlns:r="http://schemas.openxmlformats.org/officeDocument/2006/relationships" xmlns:p="http://schemas.openxmlformats.org/presentationml/2006/main">
   <p:cSld>
     <p:spTree>
@@ -3807,7 +4066,7 @@
 </p:sld>
 </file>
 
-<file path=ppt/slides/slide11.xml><?xml version="1.0" encoding="utf-8"?>
+<file path=ppt/slides/slide12.xml><?xml version="1.0" encoding="utf-8"?>
 <p:sld xmlns:a="http://schemas.openxmlformats.org/drawingml/2006/main" xmlns:r="http://schemas.openxmlformats.org/officeDocument/2006/relationships" xmlns:p="http://schemas.openxmlformats.org/presentationml/2006/main">
   <p:cSld>
     <p:spTree>
@@ -3946,7 +4205,7 @@
 </p:sld>
 </file>
 
-<file path=ppt/slides/slide12.xml><?xml version="1.0" encoding="utf-8"?>
+<file path=ppt/slides/slide13.xml><?xml version="1.0" encoding="utf-8"?>
 <p:sld xmlns:a="http://schemas.openxmlformats.org/drawingml/2006/main" xmlns:r="http://schemas.openxmlformats.org/officeDocument/2006/relationships" xmlns:p="http://schemas.openxmlformats.org/presentationml/2006/main">
   <p:cSld>
     <p:spTree>
@@ -4341,7 +4600,7 @@
 </p:sld>
 </file>
 
-<file path=ppt/slides/slide13.xml><?xml version="1.0" encoding="utf-8"?>
+<file path=ppt/slides/slide14.xml><?xml version="1.0" encoding="utf-8"?>
 <p:sld xmlns:a="http://schemas.openxmlformats.org/drawingml/2006/main" xmlns:r="http://schemas.openxmlformats.org/officeDocument/2006/relationships" xmlns:p="http://schemas.openxmlformats.org/presentationml/2006/main">
   <p:cSld>
     <p:spTree>
@@ -4969,7 +5228,7 @@
 </p:sld>
 </file>
 
-<file path=ppt/slides/slide14.xml><?xml version="1.0" encoding="utf-8"?>
+<file path=ppt/slides/slide15.xml><?xml version="1.0" encoding="utf-8"?>
 <p:sld xmlns:a="http://schemas.openxmlformats.org/drawingml/2006/main" xmlns:r="http://schemas.openxmlformats.org/officeDocument/2006/relationships" xmlns:p="http://schemas.openxmlformats.org/presentationml/2006/main">
   <p:cSld>
     <p:spTree>
@@ -5635,7 +5894,7 @@
 </p:sld>
 </file>
 
-<file path=ppt/slides/slide15.xml><?xml version="1.0" encoding="utf-8"?>
+<file path=ppt/slides/slide16.xml><?xml version="1.0" encoding="utf-8"?>
 <p:sld xmlns:a="http://schemas.openxmlformats.org/drawingml/2006/main" xmlns:r="http://schemas.openxmlformats.org/officeDocument/2006/relationships" xmlns:p="http://schemas.openxmlformats.org/presentationml/2006/main">
   <p:cSld>
     <p:spTree>
@@ -6116,7 +6375,7 @@
 </p:sld>
 </file>
 
-<file path=ppt/slides/slide16.xml><?xml version="1.0" encoding="utf-8"?>
+<file path=ppt/slides/slide17.xml><?xml version="1.0" encoding="utf-8"?>
 <p:sld xmlns:a="http://schemas.openxmlformats.org/drawingml/2006/main" xmlns:r="http://schemas.openxmlformats.org/officeDocument/2006/relationships" xmlns:p="http://schemas.openxmlformats.org/presentationml/2006/main">
   <p:cSld>
     <p:spTree>
@@ -7118,7 +7377,7 @@
 </p:sld>
 </file>
 
-<file path=ppt/slides/slide17.xml><?xml version="1.0" encoding="utf-8"?>
+<file path=ppt/slides/slide18.xml><?xml version="1.0" encoding="utf-8"?>
 <p:sld xmlns:a="http://schemas.openxmlformats.org/drawingml/2006/main" xmlns:r="http://schemas.openxmlformats.org/officeDocument/2006/relationships" xmlns:p="http://schemas.openxmlformats.org/presentationml/2006/main">
   <p:cSld>
     <p:spTree>
@@ -7341,7 +7600,7 @@
 </p:sld>
 </file>
 
-<file path=ppt/slides/slide18.xml><?xml version="1.0" encoding="utf-8"?>
+<file path=ppt/slides/slide19.xml><?xml version="1.0" encoding="utf-8"?>
 <p:sld xmlns:a="http://schemas.openxmlformats.org/drawingml/2006/main" xmlns:r="http://schemas.openxmlformats.org/officeDocument/2006/relationships" xmlns:p="http://schemas.openxmlformats.org/presentationml/2006/main">
   <p:cSld>
     <p:spTree>
@@ -7962,719 +8221,6 @@
 </p:sld>
 </file>
 
-<file path=ppt/slides/slide19.xml><?xml version="1.0" encoding="utf-8"?>
-<p:sld xmlns:a="http://schemas.openxmlformats.org/drawingml/2006/main" xmlns:r="http://schemas.openxmlformats.org/officeDocument/2006/relationships" xmlns:p="http://schemas.openxmlformats.org/presentationml/2006/main">
-  <p:cSld>
-    <p:spTree>
-      <p:nvGrpSpPr>
-        <p:cNvPr id="1" name="">
-          <a:extLst>
-            <a:ext uri="{FF2B5EF4-FFF2-40B4-BE49-F238E27FC236}">
-              <a16:creationId xmlns:a16="http://schemas.microsoft.com/office/drawing/2014/main" id="{55E85BD2-5538-52B3-CB5B-8EF741E10E10}"/>
-            </a:ext>
-          </a:extLst>
-        </p:cNvPr>
-        <p:cNvGrpSpPr/>
-        <p:nvPr/>
-      </p:nvGrpSpPr>
-      <p:grpSpPr>
-        <a:xfrm>
-          <a:off x="0" y="0"/>
-          <a:ext cx="0" cy="0"/>
-          <a:chOff x="0" y="0"/>
-          <a:chExt cx="0" cy="0"/>
-        </a:xfrm>
-      </p:grpSpPr>
-      <p:pic>
-        <p:nvPicPr>
-          <p:cNvPr id="5" name="Picture 4">
-            <a:extLst>
-              <a:ext uri="{FF2B5EF4-FFF2-40B4-BE49-F238E27FC236}">
-                <a16:creationId xmlns:a16="http://schemas.microsoft.com/office/drawing/2014/main" id="{1FE1738E-BC1C-E23A-2802-4FCB6EBD7337}"/>
-              </a:ext>
-            </a:extLst>
-          </p:cNvPr>
-          <p:cNvPicPr>
-            <a:picLocks noChangeAspect="1"/>
-          </p:cNvPicPr>
-          <p:nvPr/>
-        </p:nvPicPr>
-        <p:blipFill>
-          <a:blip r:embed="rId2"/>
-          <a:stretch>
-            <a:fillRect/>
-          </a:stretch>
-        </p:blipFill>
-        <p:spPr>
-          <a:xfrm>
-            <a:off x="0" y="0"/>
-            <a:ext cx="5526531" cy="1244193"/>
-          </a:xfrm>
-          <a:prstGeom prst="rect">
-            <a:avLst/>
-          </a:prstGeom>
-        </p:spPr>
-      </p:pic>
-      <p:sp>
-        <p:nvSpPr>
-          <p:cNvPr id="7" name="Rectangle 6">
-            <a:extLst>
-              <a:ext uri="{FF2B5EF4-FFF2-40B4-BE49-F238E27FC236}">
-                <a16:creationId xmlns:a16="http://schemas.microsoft.com/office/drawing/2014/main" id="{82B13956-F8DC-2A1B-349C-93AE518A593E}"/>
-              </a:ext>
-            </a:extLst>
-          </p:cNvPr>
-          <p:cNvSpPr/>
-          <p:nvPr/>
-        </p:nvSpPr>
-        <p:spPr>
-          <a:xfrm>
-            <a:off x="1067073" y="1704156"/>
-            <a:ext cx="7177517" cy="514385"/>
-          </a:xfrm>
-          <a:prstGeom prst="rect">
-            <a:avLst/>
-          </a:prstGeom>
-          <a:solidFill>
-            <a:schemeClr val="bg1"/>
-          </a:solidFill>
-          <a:ln>
-            <a:solidFill>
-              <a:schemeClr val="bg1"/>
-            </a:solidFill>
-          </a:ln>
-        </p:spPr>
-        <p:style>
-          <a:lnRef idx="2">
-            <a:schemeClr val="accent1">
-              <a:shade val="15000"/>
-            </a:schemeClr>
-          </a:lnRef>
-          <a:fillRef idx="1">
-            <a:schemeClr val="accent1"/>
-          </a:fillRef>
-          <a:effectRef idx="0">
-            <a:schemeClr val="accent1"/>
-          </a:effectRef>
-          <a:fontRef idx="minor">
-            <a:schemeClr val="lt1"/>
-          </a:fontRef>
-        </p:style>
-        <p:txBody>
-          <a:bodyPr rtlCol="0" anchor="ctr"/>
-          <a:lstStyle/>
-          <a:p>
-            <a:pPr algn="ctr"/>
-            <a:endParaRPr lang="es-PE"/>
-          </a:p>
-        </p:txBody>
-      </p:sp>
-      <p:pic>
-        <p:nvPicPr>
-          <p:cNvPr id="4" name="Picture 3">
-            <a:extLst>
-              <a:ext uri="{FF2B5EF4-FFF2-40B4-BE49-F238E27FC236}">
-                <a16:creationId xmlns:a16="http://schemas.microsoft.com/office/drawing/2014/main" id="{DF027ECD-3C1C-E4AD-6B15-3AE9FF573EFB}"/>
-              </a:ext>
-            </a:extLst>
-          </p:cNvPr>
-          <p:cNvPicPr>
-            <a:picLocks noChangeAspect="1"/>
-          </p:cNvPicPr>
-          <p:nvPr/>
-        </p:nvPicPr>
-        <p:blipFill>
-          <a:blip r:embed="rId3"/>
-          <a:stretch>
-            <a:fillRect/>
-          </a:stretch>
-        </p:blipFill>
-        <p:spPr>
-          <a:xfrm>
-            <a:off x="6378939" y="73829"/>
-            <a:ext cx="5526531" cy="548267"/>
-          </a:xfrm>
-          <a:prstGeom prst="rect">
-            <a:avLst/>
-          </a:prstGeom>
-        </p:spPr>
-      </p:pic>
-      <p:pic>
-        <p:nvPicPr>
-          <p:cNvPr id="6" name="Picture 5">
-            <a:extLst>
-              <a:ext uri="{FF2B5EF4-FFF2-40B4-BE49-F238E27FC236}">
-                <a16:creationId xmlns:a16="http://schemas.microsoft.com/office/drawing/2014/main" id="{07B49DC5-3420-A4F8-6E20-4F7DC6CEE581}"/>
-              </a:ext>
-            </a:extLst>
-          </p:cNvPr>
-          <p:cNvPicPr>
-            <a:picLocks noChangeAspect="1"/>
-          </p:cNvPicPr>
-          <p:nvPr/>
-        </p:nvPicPr>
-        <p:blipFill>
-          <a:blip r:embed="rId4"/>
-          <a:stretch>
-            <a:fillRect/>
-          </a:stretch>
-        </p:blipFill>
-        <p:spPr>
-          <a:xfrm>
-            <a:off x="0" y="2326253"/>
-            <a:ext cx="7111968" cy="2935303"/>
-          </a:xfrm>
-          <a:prstGeom prst="rect">
-            <a:avLst/>
-          </a:prstGeom>
-        </p:spPr>
-      </p:pic>
-      <p:pic>
-        <p:nvPicPr>
-          <p:cNvPr id="10" name="Picture 9">
-            <a:extLst>
-              <a:ext uri="{FF2B5EF4-FFF2-40B4-BE49-F238E27FC236}">
-                <a16:creationId xmlns:a16="http://schemas.microsoft.com/office/drawing/2014/main" id="{28DE5050-14E7-CC77-79D6-C1081E2B03EC}"/>
-              </a:ext>
-            </a:extLst>
-          </p:cNvPr>
-          <p:cNvPicPr>
-            <a:picLocks noChangeAspect="1"/>
-          </p:cNvPicPr>
-          <p:nvPr/>
-        </p:nvPicPr>
-        <p:blipFill>
-          <a:blip r:embed="rId5"/>
-          <a:stretch>
-            <a:fillRect/>
-          </a:stretch>
-        </p:blipFill>
-        <p:spPr>
-          <a:xfrm>
-            <a:off x="6990332" y="4312742"/>
-            <a:ext cx="5076825" cy="2438400"/>
-          </a:xfrm>
-          <a:prstGeom prst="rect">
-            <a:avLst/>
-          </a:prstGeom>
-        </p:spPr>
-      </p:pic>
-      <p:cxnSp>
-        <p:nvCxnSpPr>
-          <p:cNvPr id="11" name="Straight Connector 10">
-            <a:extLst>
-              <a:ext uri="{FF2B5EF4-FFF2-40B4-BE49-F238E27FC236}">
-                <a16:creationId xmlns:a16="http://schemas.microsoft.com/office/drawing/2014/main" id="{78374D49-D572-1AF7-1392-4018FC16A910}"/>
-              </a:ext>
-            </a:extLst>
-          </p:cNvPr>
-          <p:cNvCxnSpPr>
-            <a:cxnSpLocks/>
-          </p:cNvCxnSpPr>
-          <p:nvPr/>
-        </p:nvCxnSpPr>
-        <p:spPr>
-          <a:xfrm>
-            <a:off x="3350648" y="2731499"/>
-            <a:ext cx="1119752" cy="0"/>
-          </a:xfrm>
-          <a:prstGeom prst="line">
-            <a:avLst/>
-          </a:prstGeom>
-          <a:ln w="57150">
-            <a:solidFill>
-              <a:srgbClr val="FF0000"/>
-            </a:solidFill>
-          </a:ln>
-        </p:spPr>
-        <p:style>
-          <a:lnRef idx="1">
-            <a:schemeClr val="accent1"/>
-          </a:lnRef>
-          <a:fillRef idx="0">
-            <a:schemeClr val="accent1"/>
-          </a:fillRef>
-          <a:effectRef idx="0">
-            <a:schemeClr val="accent1"/>
-          </a:effectRef>
-          <a:fontRef idx="minor">
-            <a:schemeClr val="tx1"/>
-          </a:fontRef>
-        </p:style>
-      </p:cxnSp>
-      <p:pic>
-        <p:nvPicPr>
-          <p:cNvPr id="13" name="Picture 12">
-            <a:extLst>
-              <a:ext uri="{FF2B5EF4-FFF2-40B4-BE49-F238E27FC236}">
-                <a16:creationId xmlns:a16="http://schemas.microsoft.com/office/drawing/2014/main" id="{7CACCB58-F4FC-49E7-6732-63571B3BD697}"/>
-              </a:ext>
-            </a:extLst>
-          </p:cNvPr>
-          <p:cNvPicPr>
-            <a:picLocks noChangeAspect="1"/>
-          </p:cNvPicPr>
-          <p:nvPr/>
-        </p:nvPicPr>
-        <p:blipFill>
-          <a:blip r:embed="rId6"/>
-          <a:stretch>
-            <a:fillRect/>
-          </a:stretch>
-        </p:blipFill>
-        <p:spPr>
-          <a:xfrm>
-            <a:off x="7078939" y="760048"/>
-            <a:ext cx="5020289" cy="2025904"/>
-          </a:xfrm>
-          <a:prstGeom prst="rect">
-            <a:avLst/>
-          </a:prstGeom>
-        </p:spPr>
-      </p:pic>
-      <p:cxnSp>
-        <p:nvCxnSpPr>
-          <p:cNvPr id="15" name="Straight Connector 14">
-            <a:extLst>
-              <a:ext uri="{FF2B5EF4-FFF2-40B4-BE49-F238E27FC236}">
-                <a16:creationId xmlns:a16="http://schemas.microsoft.com/office/drawing/2014/main" id="{D0574D8B-0B7C-37DF-D342-289BB22969CC}"/>
-              </a:ext>
-            </a:extLst>
-          </p:cNvPr>
-          <p:cNvCxnSpPr>
-            <a:cxnSpLocks/>
-          </p:cNvCxnSpPr>
-          <p:nvPr/>
-        </p:nvCxnSpPr>
-        <p:spPr>
-          <a:xfrm flipV="1">
-            <a:off x="4865055" y="2705680"/>
-            <a:ext cx="2023677" cy="25819"/>
-          </a:xfrm>
-          <a:prstGeom prst="line">
-            <a:avLst/>
-          </a:prstGeom>
-          <a:ln w="57150">
-            <a:solidFill>
-              <a:srgbClr val="FF0000"/>
-            </a:solidFill>
-          </a:ln>
-        </p:spPr>
-        <p:style>
-          <a:lnRef idx="1">
-            <a:schemeClr val="accent1"/>
-          </a:lnRef>
-          <a:fillRef idx="0">
-            <a:schemeClr val="accent1"/>
-          </a:fillRef>
-          <a:effectRef idx="0">
-            <a:schemeClr val="accent1"/>
-          </a:effectRef>
-          <a:fontRef idx="minor">
-            <a:schemeClr val="tx1"/>
-          </a:fontRef>
-        </p:style>
-      </p:cxnSp>
-      <p:cxnSp>
-        <p:nvCxnSpPr>
-          <p:cNvPr id="17" name="Straight Connector 16">
-            <a:extLst>
-              <a:ext uri="{FF2B5EF4-FFF2-40B4-BE49-F238E27FC236}">
-                <a16:creationId xmlns:a16="http://schemas.microsoft.com/office/drawing/2014/main" id="{EBB8FA74-56D6-0F99-C430-86DE889A96C5}"/>
-              </a:ext>
-            </a:extLst>
-          </p:cNvPr>
-          <p:cNvCxnSpPr>
-            <a:cxnSpLocks/>
-          </p:cNvCxnSpPr>
-          <p:nvPr/>
-        </p:nvCxnSpPr>
-        <p:spPr>
-          <a:xfrm>
-            <a:off x="201048" y="3019366"/>
-            <a:ext cx="1610819" cy="0"/>
-          </a:xfrm>
-          <a:prstGeom prst="line">
-            <a:avLst/>
-          </a:prstGeom>
-          <a:ln w="57150">
-            <a:solidFill>
-              <a:srgbClr val="FF0000"/>
-            </a:solidFill>
-          </a:ln>
-        </p:spPr>
-        <p:style>
-          <a:lnRef idx="1">
-            <a:schemeClr val="accent1"/>
-          </a:lnRef>
-          <a:fillRef idx="0">
-            <a:schemeClr val="accent1"/>
-          </a:fillRef>
-          <a:effectRef idx="0">
-            <a:schemeClr val="accent1"/>
-          </a:effectRef>
-          <a:fontRef idx="minor">
-            <a:schemeClr val="tx1"/>
-          </a:fontRef>
-        </p:style>
-      </p:cxnSp>
-      <p:cxnSp>
-        <p:nvCxnSpPr>
-          <p:cNvPr id="19" name="Straight Connector 18">
-            <a:extLst>
-              <a:ext uri="{FF2B5EF4-FFF2-40B4-BE49-F238E27FC236}">
-                <a16:creationId xmlns:a16="http://schemas.microsoft.com/office/drawing/2014/main" id="{8A6D3DE3-81CC-2292-2AA5-B84039CBB1A6}"/>
-              </a:ext>
-            </a:extLst>
-          </p:cNvPr>
-          <p:cNvCxnSpPr>
-            <a:cxnSpLocks/>
-          </p:cNvCxnSpPr>
-          <p:nvPr/>
-        </p:nvCxnSpPr>
-        <p:spPr>
-          <a:xfrm>
-            <a:off x="5379513" y="3019366"/>
-            <a:ext cx="1610819" cy="0"/>
-          </a:xfrm>
-          <a:prstGeom prst="line">
-            <a:avLst/>
-          </a:prstGeom>
-          <a:ln w="57150">
-            <a:solidFill>
-              <a:srgbClr val="FF0000"/>
-            </a:solidFill>
-          </a:ln>
-        </p:spPr>
-        <p:style>
-          <a:lnRef idx="1">
-            <a:schemeClr val="accent1"/>
-          </a:lnRef>
-          <a:fillRef idx="0">
-            <a:schemeClr val="accent1"/>
-          </a:fillRef>
-          <a:effectRef idx="0">
-            <a:schemeClr val="accent1"/>
-          </a:effectRef>
-          <a:fontRef idx="minor">
-            <a:schemeClr val="tx1"/>
-          </a:fontRef>
-        </p:style>
-      </p:cxnSp>
-      <p:cxnSp>
-        <p:nvCxnSpPr>
-          <p:cNvPr id="20" name="Straight Connector 19">
-            <a:extLst>
-              <a:ext uri="{FF2B5EF4-FFF2-40B4-BE49-F238E27FC236}">
-                <a16:creationId xmlns:a16="http://schemas.microsoft.com/office/drawing/2014/main" id="{ABC498F8-B1C4-0454-E071-B027FF6BAAE4}"/>
-              </a:ext>
-            </a:extLst>
-          </p:cNvPr>
-          <p:cNvCxnSpPr>
-            <a:cxnSpLocks/>
-          </p:cNvCxnSpPr>
-          <p:nvPr/>
-        </p:nvCxnSpPr>
-        <p:spPr>
-          <a:xfrm>
-            <a:off x="201047" y="3307232"/>
-            <a:ext cx="3149601" cy="0"/>
-          </a:xfrm>
-          <a:prstGeom prst="line">
-            <a:avLst/>
-          </a:prstGeom>
-          <a:ln w="57150">
-            <a:solidFill>
-              <a:srgbClr val="FF0000"/>
-            </a:solidFill>
-          </a:ln>
-        </p:spPr>
-        <p:style>
-          <a:lnRef idx="1">
-            <a:schemeClr val="accent1"/>
-          </a:lnRef>
-          <a:fillRef idx="0">
-            <a:schemeClr val="accent1"/>
-          </a:fillRef>
-          <a:effectRef idx="0">
-            <a:schemeClr val="accent1"/>
-          </a:effectRef>
-          <a:fontRef idx="minor">
-            <a:schemeClr val="tx1"/>
-          </a:fontRef>
-        </p:style>
-      </p:cxnSp>
-      <p:cxnSp>
-        <p:nvCxnSpPr>
-          <p:cNvPr id="22" name="Straight Connector 21">
-            <a:extLst>
-              <a:ext uri="{FF2B5EF4-FFF2-40B4-BE49-F238E27FC236}">
-                <a16:creationId xmlns:a16="http://schemas.microsoft.com/office/drawing/2014/main" id="{2D849CE7-8E33-3F3A-5FB7-138F13852B1C}"/>
-              </a:ext>
-            </a:extLst>
-          </p:cNvPr>
-          <p:cNvCxnSpPr>
-            <a:cxnSpLocks/>
-          </p:cNvCxnSpPr>
-          <p:nvPr/>
-        </p:nvCxnSpPr>
-        <p:spPr>
-          <a:xfrm>
-            <a:off x="237066" y="3662832"/>
-            <a:ext cx="6753266" cy="0"/>
-          </a:xfrm>
-          <a:prstGeom prst="line">
-            <a:avLst/>
-          </a:prstGeom>
-          <a:ln w="57150">
-            <a:solidFill>
-              <a:srgbClr val="00B0F0"/>
-            </a:solidFill>
-          </a:ln>
-        </p:spPr>
-        <p:style>
-          <a:lnRef idx="1">
-            <a:schemeClr val="accent1"/>
-          </a:lnRef>
-          <a:fillRef idx="0">
-            <a:schemeClr val="accent1"/>
-          </a:fillRef>
-          <a:effectRef idx="0">
-            <a:schemeClr val="accent1"/>
-          </a:effectRef>
-          <a:fontRef idx="minor">
-            <a:schemeClr val="tx1"/>
-          </a:fontRef>
-        </p:style>
-      </p:cxnSp>
-      <p:cxnSp>
-        <p:nvCxnSpPr>
-          <p:cNvPr id="24" name="Straight Connector 23">
-            <a:extLst>
-              <a:ext uri="{FF2B5EF4-FFF2-40B4-BE49-F238E27FC236}">
-                <a16:creationId xmlns:a16="http://schemas.microsoft.com/office/drawing/2014/main" id="{E3933325-9DAD-F287-BE08-2F2815B55E69}"/>
-              </a:ext>
-            </a:extLst>
-          </p:cNvPr>
-          <p:cNvCxnSpPr>
-            <a:cxnSpLocks/>
-          </p:cNvCxnSpPr>
-          <p:nvPr/>
-        </p:nvCxnSpPr>
-        <p:spPr>
-          <a:xfrm>
-            <a:off x="201047" y="3950699"/>
-            <a:ext cx="5178466" cy="0"/>
-          </a:xfrm>
-          <a:prstGeom prst="line">
-            <a:avLst/>
-          </a:prstGeom>
-          <a:ln w="57150">
-            <a:solidFill>
-              <a:srgbClr val="00B0F0"/>
-            </a:solidFill>
-          </a:ln>
-        </p:spPr>
-        <p:style>
-          <a:lnRef idx="1">
-            <a:schemeClr val="accent1"/>
-          </a:lnRef>
-          <a:fillRef idx="0">
-            <a:schemeClr val="accent1"/>
-          </a:fillRef>
-          <a:effectRef idx="0">
-            <a:schemeClr val="accent1"/>
-          </a:effectRef>
-          <a:fontRef idx="minor">
-            <a:schemeClr val="tx1"/>
-          </a:fontRef>
-        </p:style>
-      </p:cxnSp>
-      <p:cxnSp>
-        <p:nvCxnSpPr>
-          <p:cNvPr id="26" name="Straight Connector 25">
-            <a:extLst>
-              <a:ext uri="{FF2B5EF4-FFF2-40B4-BE49-F238E27FC236}">
-                <a16:creationId xmlns:a16="http://schemas.microsoft.com/office/drawing/2014/main" id="{E9A83E62-0248-069D-AF49-B35269FE4978}"/>
-              </a:ext>
-            </a:extLst>
-          </p:cNvPr>
-          <p:cNvCxnSpPr>
-            <a:cxnSpLocks/>
-          </p:cNvCxnSpPr>
-          <p:nvPr/>
-        </p:nvCxnSpPr>
-        <p:spPr>
-          <a:xfrm>
-            <a:off x="201047" y="4600609"/>
-            <a:ext cx="6419886" cy="0"/>
-          </a:xfrm>
-          <a:prstGeom prst="line">
-            <a:avLst/>
-          </a:prstGeom>
-          <a:ln w="57150">
-            <a:solidFill>
-              <a:srgbClr val="FF0000"/>
-            </a:solidFill>
-          </a:ln>
-        </p:spPr>
-        <p:style>
-          <a:lnRef idx="1">
-            <a:schemeClr val="accent1"/>
-          </a:lnRef>
-          <a:fillRef idx="0">
-            <a:schemeClr val="accent1"/>
-          </a:fillRef>
-          <a:effectRef idx="0">
-            <a:schemeClr val="accent1"/>
-          </a:effectRef>
-          <a:fontRef idx="minor">
-            <a:schemeClr val="tx1"/>
-          </a:fontRef>
-        </p:style>
-      </p:cxnSp>
-      <p:cxnSp>
-        <p:nvCxnSpPr>
-          <p:cNvPr id="30" name="Straight Connector 29">
-            <a:extLst>
-              <a:ext uri="{FF2B5EF4-FFF2-40B4-BE49-F238E27FC236}">
-                <a16:creationId xmlns:a16="http://schemas.microsoft.com/office/drawing/2014/main" id="{2066F304-F8CD-0ABF-34B7-1340AF892E33}"/>
-              </a:ext>
-            </a:extLst>
-          </p:cNvPr>
-          <p:cNvCxnSpPr>
-            <a:cxnSpLocks/>
-          </p:cNvCxnSpPr>
-          <p:nvPr/>
-        </p:nvCxnSpPr>
-        <p:spPr>
-          <a:xfrm>
-            <a:off x="195208" y="4245007"/>
-            <a:ext cx="6687685" cy="0"/>
-          </a:xfrm>
-          <a:prstGeom prst="line">
-            <a:avLst/>
-          </a:prstGeom>
-          <a:ln w="57150">
-            <a:solidFill>
-              <a:srgbClr val="FF0000"/>
-            </a:solidFill>
-          </a:ln>
-        </p:spPr>
-        <p:style>
-          <a:lnRef idx="1">
-            <a:schemeClr val="accent1"/>
-          </a:lnRef>
-          <a:fillRef idx="0">
-            <a:schemeClr val="accent1"/>
-          </a:fillRef>
-          <a:effectRef idx="0">
-            <a:schemeClr val="accent1"/>
-          </a:effectRef>
-          <a:fontRef idx="minor">
-            <a:schemeClr val="tx1"/>
-          </a:fontRef>
-        </p:style>
-      </p:cxnSp>
-      <p:cxnSp>
-        <p:nvCxnSpPr>
-          <p:cNvPr id="32" name="Straight Connector 31">
-            <a:extLst>
-              <a:ext uri="{FF2B5EF4-FFF2-40B4-BE49-F238E27FC236}">
-                <a16:creationId xmlns:a16="http://schemas.microsoft.com/office/drawing/2014/main" id="{581C9D6D-7E97-3659-9736-E0DD6B53D598}"/>
-              </a:ext>
-            </a:extLst>
-          </p:cNvPr>
-          <p:cNvCxnSpPr>
-            <a:cxnSpLocks/>
-          </p:cNvCxnSpPr>
-          <p:nvPr/>
-        </p:nvCxnSpPr>
-        <p:spPr>
-          <a:xfrm>
-            <a:off x="195208" y="4905409"/>
-            <a:ext cx="6729689" cy="0"/>
-          </a:xfrm>
-          <a:prstGeom prst="line">
-            <a:avLst/>
-          </a:prstGeom>
-          <a:ln w="57150">
-            <a:solidFill>
-              <a:srgbClr val="FF0000"/>
-            </a:solidFill>
-          </a:ln>
-        </p:spPr>
-        <p:style>
-          <a:lnRef idx="1">
-            <a:schemeClr val="accent1"/>
-          </a:lnRef>
-          <a:fillRef idx="0">
-            <a:schemeClr val="accent1"/>
-          </a:fillRef>
-          <a:effectRef idx="0">
-            <a:schemeClr val="accent1"/>
-          </a:effectRef>
-          <a:fontRef idx="minor">
-            <a:schemeClr val="tx1"/>
-          </a:fontRef>
-        </p:style>
-      </p:cxnSp>
-      <p:cxnSp>
-        <p:nvCxnSpPr>
-          <p:cNvPr id="34" name="Straight Connector 33">
-            <a:extLst>
-              <a:ext uri="{FF2B5EF4-FFF2-40B4-BE49-F238E27FC236}">
-                <a16:creationId xmlns:a16="http://schemas.microsoft.com/office/drawing/2014/main" id="{F832A475-DC92-07B4-B70C-C701414B1762}"/>
-              </a:ext>
-            </a:extLst>
-          </p:cNvPr>
-          <p:cNvCxnSpPr>
-            <a:cxnSpLocks/>
-          </p:cNvCxnSpPr>
-          <p:nvPr/>
-        </p:nvCxnSpPr>
-        <p:spPr>
-          <a:xfrm>
-            <a:off x="174205" y="5261556"/>
-            <a:ext cx="4296195" cy="0"/>
-          </a:xfrm>
-          <a:prstGeom prst="line">
-            <a:avLst/>
-          </a:prstGeom>
-          <a:ln w="57150">
-            <a:solidFill>
-              <a:srgbClr val="FF0000"/>
-            </a:solidFill>
-          </a:ln>
-        </p:spPr>
-        <p:style>
-          <a:lnRef idx="1">
-            <a:schemeClr val="accent1"/>
-          </a:lnRef>
-          <a:fillRef idx="0">
-            <a:schemeClr val="accent1"/>
-          </a:fillRef>
-          <a:effectRef idx="0">
-            <a:schemeClr val="accent1"/>
-          </a:effectRef>
-          <a:fontRef idx="minor">
-            <a:schemeClr val="tx1"/>
-          </a:fontRef>
-        </p:style>
-      </p:cxnSp>
-    </p:spTree>
-    <p:extLst>
-      <p:ext uri="{BB962C8B-B14F-4D97-AF65-F5344CB8AC3E}">
-        <p14:creationId xmlns:p14="http://schemas.microsoft.com/office/powerpoint/2010/main" val="2021459348"/>
-      </p:ext>
-    </p:extLst>
-  </p:cSld>
-  <p:clrMapOvr>
-    <a:masterClrMapping/>
-  </p:clrMapOvr>
-</p:sld>
-</file>
-
 <file path=ppt/slides/slide2.xml><?xml version="1.0" encoding="utf-8"?>
 <p:sld xmlns:a="http://schemas.openxmlformats.org/drawingml/2006/main" xmlns:r="http://schemas.openxmlformats.org/officeDocument/2006/relationships" xmlns:p="http://schemas.openxmlformats.org/presentationml/2006/main">
   <p:cSld>
@@ -8881,6 +8427,719 @@
         <p:cNvPr id="1" name="">
           <a:extLst>
             <a:ext uri="{FF2B5EF4-FFF2-40B4-BE49-F238E27FC236}">
+              <a16:creationId xmlns:a16="http://schemas.microsoft.com/office/drawing/2014/main" id="{55E85BD2-5538-52B3-CB5B-8EF741E10E10}"/>
+            </a:ext>
+          </a:extLst>
+        </p:cNvPr>
+        <p:cNvGrpSpPr/>
+        <p:nvPr/>
+      </p:nvGrpSpPr>
+      <p:grpSpPr>
+        <a:xfrm>
+          <a:off x="0" y="0"/>
+          <a:ext cx="0" cy="0"/>
+          <a:chOff x="0" y="0"/>
+          <a:chExt cx="0" cy="0"/>
+        </a:xfrm>
+      </p:grpSpPr>
+      <p:pic>
+        <p:nvPicPr>
+          <p:cNvPr id="5" name="Picture 4">
+            <a:extLst>
+              <a:ext uri="{FF2B5EF4-FFF2-40B4-BE49-F238E27FC236}">
+                <a16:creationId xmlns:a16="http://schemas.microsoft.com/office/drawing/2014/main" id="{1FE1738E-BC1C-E23A-2802-4FCB6EBD7337}"/>
+              </a:ext>
+            </a:extLst>
+          </p:cNvPr>
+          <p:cNvPicPr>
+            <a:picLocks noChangeAspect="1"/>
+          </p:cNvPicPr>
+          <p:nvPr/>
+        </p:nvPicPr>
+        <p:blipFill>
+          <a:blip r:embed="rId2"/>
+          <a:stretch>
+            <a:fillRect/>
+          </a:stretch>
+        </p:blipFill>
+        <p:spPr>
+          <a:xfrm>
+            <a:off x="0" y="0"/>
+            <a:ext cx="5526531" cy="1244193"/>
+          </a:xfrm>
+          <a:prstGeom prst="rect">
+            <a:avLst/>
+          </a:prstGeom>
+        </p:spPr>
+      </p:pic>
+      <p:sp>
+        <p:nvSpPr>
+          <p:cNvPr id="7" name="Rectangle 6">
+            <a:extLst>
+              <a:ext uri="{FF2B5EF4-FFF2-40B4-BE49-F238E27FC236}">
+                <a16:creationId xmlns:a16="http://schemas.microsoft.com/office/drawing/2014/main" id="{82B13956-F8DC-2A1B-349C-93AE518A593E}"/>
+              </a:ext>
+            </a:extLst>
+          </p:cNvPr>
+          <p:cNvSpPr/>
+          <p:nvPr/>
+        </p:nvSpPr>
+        <p:spPr>
+          <a:xfrm>
+            <a:off x="1067073" y="1704156"/>
+            <a:ext cx="7177517" cy="514385"/>
+          </a:xfrm>
+          <a:prstGeom prst="rect">
+            <a:avLst/>
+          </a:prstGeom>
+          <a:solidFill>
+            <a:schemeClr val="bg1"/>
+          </a:solidFill>
+          <a:ln>
+            <a:solidFill>
+              <a:schemeClr val="bg1"/>
+            </a:solidFill>
+          </a:ln>
+        </p:spPr>
+        <p:style>
+          <a:lnRef idx="2">
+            <a:schemeClr val="accent1">
+              <a:shade val="15000"/>
+            </a:schemeClr>
+          </a:lnRef>
+          <a:fillRef idx="1">
+            <a:schemeClr val="accent1"/>
+          </a:fillRef>
+          <a:effectRef idx="0">
+            <a:schemeClr val="accent1"/>
+          </a:effectRef>
+          <a:fontRef idx="minor">
+            <a:schemeClr val="lt1"/>
+          </a:fontRef>
+        </p:style>
+        <p:txBody>
+          <a:bodyPr rtlCol="0" anchor="ctr"/>
+          <a:lstStyle/>
+          <a:p>
+            <a:pPr algn="ctr"/>
+            <a:endParaRPr lang="es-PE"/>
+          </a:p>
+        </p:txBody>
+      </p:sp>
+      <p:pic>
+        <p:nvPicPr>
+          <p:cNvPr id="4" name="Picture 3">
+            <a:extLst>
+              <a:ext uri="{FF2B5EF4-FFF2-40B4-BE49-F238E27FC236}">
+                <a16:creationId xmlns:a16="http://schemas.microsoft.com/office/drawing/2014/main" id="{DF027ECD-3C1C-E4AD-6B15-3AE9FF573EFB}"/>
+              </a:ext>
+            </a:extLst>
+          </p:cNvPr>
+          <p:cNvPicPr>
+            <a:picLocks noChangeAspect="1"/>
+          </p:cNvPicPr>
+          <p:nvPr/>
+        </p:nvPicPr>
+        <p:blipFill>
+          <a:blip r:embed="rId3"/>
+          <a:stretch>
+            <a:fillRect/>
+          </a:stretch>
+        </p:blipFill>
+        <p:spPr>
+          <a:xfrm>
+            <a:off x="6378939" y="73829"/>
+            <a:ext cx="5526531" cy="548267"/>
+          </a:xfrm>
+          <a:prstGeom prst="rect">
+            <a:avLst/>
+          </a:prstGeom>
+        </p:spPr>
+      </p:pic>
+      <p:pic>
+        <p:nvPicPr>
+          <p:cNvPr id="6" name="Picture 5">
+            <a:extLst>
+              <a:ext uri="{FF2B5EF4-FFF2-40B4-BE49-F238E27FC236}">
+                <a16:creationId xmlns:a16="http://schemas.microsoft.com/office/drawing/2014/main" id="{07B49DC5-3420-A4F8-6E20-4F7DC6CEE581}"/>
+              </a:ext>
+            </a:extLst>
+          </p:cNvPr>
+          <p:cNvPicPr>
+            <a:picLocks noChangeAspect="1"/>
+          </p:cNvPicPr>
+          <p:nvPr/>
+        </p:nvPicPr>
+        <p:blipFill>
+          <a:blip r:embed="rId4"/>
+          <a:stretch>
+            <a:fillRect/>
+          </a:stretch>
+        </p:blipFill>
+        <p:spPr>
+          <a:xfrm>
+            <a:off x="0" y="2326253"/>
+            <a:ext cx="7111968" cy="2935303"/>
+          </a:xfrm>
+          <a:prstGeom prst="rect">
+            <a:avLst/>
+          </a:prstGeom>
+        </p:spPr>
+      </p:pic>
+      <p:pic>
+        <p:nvPicPr>
+          <p:cNvPr id="10" name="Picture 9">
+            <a:extLst>
+              <a:ext uri="{FF2B5EF4-FFF2-40B4-BE49-F238E27FC236}">
+                <a16:creationId xmlns:a16="http://schemas.microsoft.com/office/drawing/2014/main" id="{28DE5050-14E7-CC77-79D6-C1081E2B03EC}"/>
+              </a:ext>
+            </a:extLst>
+          </p:cNvPr>
+          <p:cNvPicPr>
+            <a:picLocks noChangeAspect="1"/>
+          </p:cNvPicPr>
+          <p:nvPr/>
+        </p:nvPicPr>
+        <p:blipFill>
+          <a:blip r:embed="rId5"/>
+          <a:stretch>
+            <a:fillRect/>
+          </a:stretch>
+        </p:blipFill>
+        <p:spPr>
+          <a:xfrm>
+            <a:off x="6990332" y="4312742"/>
+            <a:ext cx="5076825" cy="2438400"/>
+          </a:xfrm>
+          <a:prstGeom prst="rect">
+            <a:avLst/>
+          </a:prstGeom>
+        </p:spPr>
+      </p:pic>
+      <p:cxnSp>
+        <p:nvCxnSpPr>
+          <p:cNvPr id="11" name="Straight Connector 10">
+            <a:extLst>
+              <a:ext uri="{FF2B5EF4-FFF2-40B4-BE49-F238E27FC236}">
+                <a16:creationId xmlns:a16="http://schemas.microsoft.com/office/drawing/2014/main" id="{78374D49-D572-1AF7-1392-4018FC16A910}"/>
+              </a:ext>
+            </a:extLst>
+          </p:cNvPr>
+          <p:cNvCxnSpPr>
+            <a:cxnSpLocks/>
+          </p:cNvCxnSpPr>
+          <p:nvPr/>
+        </p:nvCxnSpPr>
+        <p:spPr>
+          <a:xfrm>
+            <a:off x="3350648" y="2731499"/>
+            <a:ext cx="1119752" cy="0"/>
+          </a:xfrm>
+          <a:prstGeom prst="line">
+            <a:avLst/>
+          </a:prstGeom>
+          <a:ln w="57150">
+            <a:solidFill>
+              <a:srgbClr val="FF0000"/>
+            </a:solidFill>
+          </a:ln>
+        </p:spPr>
+        <p:style>
+          <a:lnRef idx="1">
+            <a:schemeClr val="accent1"/>
+          </a:lnRef>
+          <a:fillRef idx="0">
+            <a:schemeClr val="accent1"/>
+          </a:fillRef>
+          <a:effectRef idx="0">
+            <a:schemeClr val="accent1"/>
+          </a:effectRef>
+          <a:fontRef idx="minor">
+            <a:schemeClr val="tx1"/>
+          </a:fontRef>
+        </p:style>
+      </p:cxnSp>
+      <p:pic>
+        <p:nvPicPr>
+          <p:cNvPr id="13" name="Picture 12">
+            <a:extLst>
+              <a:ext uri="{FF2B5EF4-FFF2-40B4-BE49-F238E27FC236}">
+                <a16:creationId xmlns:a16="http://schemas.microsoft.com/office/drawing/2014/main" id="{7CACCB58-F4FC-49E7-6732-63571B3BD697}"/>
+              </a:ext>
+            </a:extLst>
+          </p:cNvPr>
+          <p:cNvPicPr>
+            <a:picLocks noChangeAspect="1"/>
+          </p:cNvPicPr>
+          <p:nvPr/>
+        </p:nvPicPr>
+        <p:blipFill>
+          <a:blip r:embed="rId6"/>
+          <a:stretch>
+            <a:fillRect/>
+          </a:stretch>
+        </p:blipFill>
+        <p:spPr>
+          <a:xfrm>
+            <a:off x="7078939" y="760048"/>
+            <a:ext cx="5020289" cy="2025904"/>
+          </a:xfrm>
+          <a:prstGeom prst="rect">
+            <a:avLst/>
+          </a:prstGeom>
+        </p:spPr>
+      </p:pic>
+      <p:cxnSp>
+        <p:nvCxnSpPr>
+          <p:cNvPr id="15" name="Straight Connector 14">
+            <a:extLst>
+              <a:ext uri="{FF2B5EF4-FFF2-40B4-BE49-F238E27FC236}">
+                <a16:creationId xmlns:a16="http://schemas.microsoft.com/office/drawing/2014/main" id="{D0574D8B-0B7C-37DF-D342-289BB22969CC}"/>
+              </a:ext>
+            </a:extLst>
+          </p:cNvPr>
+          <p:cNvCxnSpPr>
+            <a:cxnSpLocks/>
+          </p:cNvCxnSpPr>
+          <p:nvPr/>
+        </p:nvCxnSpPr>
+        <p:spPr>
+          <a:xfrm flipV="1">
+            <a:off x="4865055" y="2705680"/>
+            <a:ext cx="2023677" cy="25819"/>
+          </a:xfrm>
+          <a:prstGeom prst="line">
+            <a:avLst/>
+          </a:prstGeom>
+          <a:ln w="57150">
+            <a:solidFill>
+              <a:srgbClr val="FF0000"/>
+            </a:solidFill>
+          </a:ln>
+        </p:spPr>
+        <p:style>
+          <a:lnRef idx="1">
+            <a:schemeClr val="accent1"/>
+          </a:lnRef>
+          <a:fillRef idx="0">
+            <a:schemeClr val="accent1"/>
+          </a:fillRef>
+          <a:effectRef idx="0">
+            <a:schemeClr val="accent1"/>
+          </a:effectRef>
+          <a:fontRef idx="minor">
+            <a:schemeClr val="tx1"/>
+          </a:fontRef>
+        </p:style>
+      </p:cxnSp>
+      <p:cxnSp>
+        <p:nvCxnSpPr>
+          <p:cNvPr id="17" name="Straight Connector 16">
+            <a:extLst>
+              <a:ext uri="{FF2B5EF4-FFF2-40B4-BE49-F238E27FC236}">
+                <a16:creationId xmlns:a16="http://schemas.microsoft.com/office/drawing/2014/main" id="{EBB8FA74-56D6-0F99-C430-86DE889A96C5}"/>
+              </a:ext>
+            </a:extLst>
+          </p:cNvPr>
+          <p:cNvCxnSpPr>
+            <a:cxnSpLocks/>
+          </p:cNvCxnSpPr>
+          <p:nvPr/>
+        </p:nvCxnSpPr>
+        <p:spPr>
+          <a:xfrm>
+            <a:off x="201048" y="3019366"/>
+            <a:ext cx="1610819" cy="0"/>
+          </a:xfrm>
+          <a:prstGeom prst="line">
+            <a:avLst/>
+          </a:prstGeom>
+          <a:ln w="57150">
+            <a:solidFill>
+              <a:srgbClr val="FF0000"/>
+            </a:solidFill>
+          </a:ln>
+        </p:spPr>
+        <p:style>
+          <a:lnRef idx="1">
+            <a:schemeClr val="accent1"/>
+          </a:lnRef>
+          <a:fillRef idx="0">
+            <a:schemeClr val="accent1"/>
+          </a:fillRef>
+          <a:effectRef idx="0">
+            <a:schemeClr val="accent1"/>
+          </a:effectRef>
+          <a:fontRef idx="minor">
+            <a:schemeClr val="tx1"/>
+          </a:fontRef>
+        </p:style>
+      </p:cxnSp>
+      <p:cxnSp>
+        <p:nvCxnSpPr>
+          <p:cNvPr id="19" name="Straight Connector 18">
+            <a:extLst>
+              <a:ext uri="{FF2B5EF4-FFF2-40B4-BE49-F238E27FC236}">
+                <a16:creationId xmlns:a16="http://schemas.microsoft.com/office/drawing/2014/main" id="{8A6D3DE3-81CC-2292-2AA5-B84039CBB1A6}"/>
+              </a:ext>
+            </a:extLst>
+          </p:cNvPr>
+          <p:cNvCxnSpPr>
+            <a:cxnSpLocks/>
+          </p:cNvCxnSpPr>
+          <p:nvPr/>
+        </p:nvCxnSpPr>
+        <p:spPr>
+          <a:xfrm>
+            <a:off x="5379513" y="3019366"/>
+            <a:ext cx="1610819" cy="0"/>
+          </a:xfrm>
+          <a:prstGeom prst="line">
+            <a:avLst/>
+          </a:prstGeom>
+          <a:ln w="57150">
+            <a:solidFill>
+              <a:srgbClr val="FF0000"/>
+            </a:solidFill>
+          </a:ln>
+        </p:spPr>
+        <p:style>
+          <a:lnRef idx="1">
+            <a:schemeClr val="accent1"/>
+          </a:lnRef>
+          <a:fillRef idx="0">
+            <a:schemeClr val="accent1"/>
+          </a:fillRef>
+          <a:effectRef idx="0">
+            <a:schemeClr val="accent1"/>
+          </a:effectRef>
+          <a:fontRef idx="minor">
+            <a:schemeClr val="tx1"/>
+          </a:fontRef>
+        </p:style>
+      </p:cxnSp>
+      <p:cxnSp>
+        <p:nvCxnSpPr>
+          <p:cNvPr id="20" name="Straight Connector 19">
+            <a:extLst>
+              <a:ext uri="{FF2B5EF4-FFF2-40B4-BE49-F238E27FC236}">
+                <a16:creationId xmlns:a16="http://schemas.microsoft.com/office/drawing/2014/main" id="{ABC498F8-B1C4-0454-E071-B027FF6BAAE4}"/>
+              </a:ext>
+            </a:extLst>
+          </p:cNvPr>
+          <p:cNvCxnSpPr>
+            <a:cxnSpLocks/>
+          </p:cNvCxnSpPr>
+          <p:nvPr/>
+        </p:nvCxnSpPr>
+        <p:spPr>
+          <a:xfrm>
+            <a:off x="201047" y="3307232"/>
+            <a:ext cx="3149601" cy="0"/>
+          </a:xfrm>
+          <a:prstGeom prst="line">
+            <a:avLst/>
+          </a:prstGeom>
+          <a:ln w="57150">
+            <a:solidFill>
+              <a:srgbClr val="FF0000"/>
+            </a:solidFill>
+          </a:ln>
+        </p:spPr>
+        <p:style>
+          <a:lnRef idx="1">
+            <a:schemeClr val="accent1"/>
+          </a:lnRef>
+          <a:fillRef idx="0">
+            <a:schemeClr val="accent1"/>
+          </a:fillRef>
+          <a:effectRef idx="0">
+            <a:schemeClr val="accent1"/>
+          </a:effectRef>
+          <a:fontRef idx="minor">
+            <a:schemeClr val="tx1"/>
+          </a:fontRef>
+        </p:style>
+      </p:cxnSp>
+      <p:cxnSp>
+        <p:nvCxnSpPr>
+          <p:cNvPr id="22" name="Straight Connector 21">
+            <a:extLst>
+              <a:ext uri="{FF2B5EF4-FFF2-40B4-BE49-F238E27FC236}">
+                <a16:creationId xmlns:a16="http://schemas.microsoft.com/office/drawing/2014/main" id="{2D849CE7-8E33-3F3A-5FB7-138F13852B1C}"/>
+              </a:ext>
+            </a:extLst>
+          </p:cNvPr>
+          <p:cNvCxnSpPr>
+            <a:cxnSpLocks/>
+          </p:cNvCxnSpPr>
+          <p:nvPr/>
+        </p:nvCxnSpPr>
+        <p:spPr>
+          <a:xfrm>
+            <a:off x="237066" y="3662832"/>
+            <a:ext cx="6753266" cy="0"/>
+          </a:xfrm>
+          <a:prstGeom prst="line">
+            <a:avLst/>
+          </a:prstGeom>
+          <a:ln w="57150">
+            <a:solidFill>
+              <a:srgbClr val="00B0F0"/>
+            </a:solidFill>
+          </a:ln>
+        </p:spPr>
+        <p:style>
+          <a:lnRef idx="1">
+            <a:schemeClr val="accent1"/>
+          </a:lnRef>
+          <a:fillRef idx="0">
+            <a:schemeClr val="accent1"/>
+          </a:fillRef>
+          <a:effectRef idx="0">
+            <a:schemeClr val="accent1"/>
+          </a:effectRef>
+          <a:fontRef idx="minor">
+            <a:schemeClr val="tx1"/>
+          </a:fontRef>
+        </p:style>
+      </p:cxnSp>
+      <p:cxnSp>
+        <p:nvCxnSpPr>
+          <p:cNvPr id="24" name="Straight Connector 23">
+            <a:extLst>
+              <a:ext uri="{FF2B5EF4-FFF2-40B4-BE49-F238E27FC236}">
+                <a16:creationId xmlns:a16="http://schemas.microsoft.com/office/drawing/2014/main" id="{E3933325-9DAD-F287-BE08-2F2815B55E69}"/>
+              </a:ext>
+            </a:extLst>
+          </p:cNvPr>
+          <p:cNvCxnSpPr>
+            <a:cxnSpLocks/>
+          </p:cNvCxnSpPr>
+          <p:nvPr/>
+        </p:nvCxnSpPr>
+        <p:spPr>
+          <a:xfrm>
+            <a:off x="201047" y="3950699"/>
+            <a:ext cx="5178466" cy="0"/>
+          </a:xfrm>
+          <a:prstGeom prst="line">
+            <a:avLst/>
+          </a:prstGeom>
+          <a:ln w="57150">
+            <a:solidFill>
+              <a:srgbClr val="00B0F0"/>
+            </a:solidFill>
+          </a:ln>
+        </p:spPr>
+        <p:style>
+          <a:lnRef idx="1">
+            <a:schemeClr val="accent1"/>
+          </a:lnRef>
+          <a:fillRef idx="0">
+            <a:schemeClr val="accent1"/>
+          </a:fillRef>
+          <a:effectRef idx="0">
+            <a:schemeClr val="accent1"/>
+          </a:effectRef>
+          <a:fontRef idx="minor">
+            <a:schemeClr val="tx1"/>
+          </a:fontRef>
+        </p:style>
+      </p:cxnSp>
+      <p:cxnSp>
+        <p:nvCxnSpPr>
+          <p:cNvPr id="26" name="Straight Connector 25">
+            <a:extLst>
+              <a:ext uri="{FF2B5EF4-FFF2-40B4-BE49-F238E27FC236}">
+                <a16:creationId xmlns:a16="http://schemas.microsoft.com/office/drawing/2014/main" id="{E9A83E62-0248-069D-AF49-B35269FE4978}"/>
+              </a:ext>
+            </a:extLst>
+          </p:cNvPr>
+          <p:cNvCxnSpPr>
+            <a:cxnSpLocks/>
+          </p:cNvCxnSpPr>
+          <p:nvPr/>
+        </p:nvCxnSpPr>
+        <p:spPr>
+          <a:xfrm>
+            <a:off x="201047" y="4600609"/>
+            <a:ext cx="6419886" cy="0"/>
+          </a:xfrm>
+          <a:prstGeom prst="line">
+            <a:avLst/>
+          </a:prstGeom>
+          <a:ln w="57150">
+            <a:solidFill>
+              <a:srgbClr val="FF0000"/>
+            </a:solidFill>
+          </a:ln>
+        </p:spPr>
+        <p:style>
+          <a:lnRef idx="1">
+            <a:schemeClr val="accent1"/>
+          </a:lnRef>
+          <a:fillRef idx="0">
+            <a:schemeClr val="accent1"/>
+          </a:fillRef>
+          <a:effectRef idx="0">
+            <a:schemeClr val="accent1"/>
+          </a:effectRef>
+          <a:fontRef idx="minor">
+            <a:schemeClr val="tx1"/>
+          </a:fontRef>
+        </p:style>
+      </p:cxnSp>
+      <p:cxnSp>
+        <p:nvCxnSpPr>
+          <p:cNvPr id="30" name="Straight Connector 29">
+            <a:extLst>
+              <a:ext uri="{FF2B5EF4-FFF2-40B4-BE49-F238E27FC236}">
+                <a16:creationId xmlns:a16="http://schemas.microsoft.com/office/drawing/2014/main" id="{2066F304-F8CD-0ABF-34B7-1340AF892E33}"/>
+              </a:ext>
+            </a:extLst>
+          </p:cNvPr>
+          <p:cNvCxnSpPr>
+            <a:cxnSpLocks/>
+          </p:cNvCxnSpPr>
+          <p:nvPr/>
+        </p:nvCxnSpPr>
+        <p:spPr>
+          <a:xfrm>
+            <a:off x="195208" y="4245007"/>
+            <a:ext cx="6687685" cy="0"/>
+          </a:xfrm>
+          <a:prstGeom prst="line">
+            <a:avLst/>
+          </a:prstGeom>
+          <a:ln w="57150">
+            <a:solidFill>
+              <a:srgbClr val="FF0000"/>
+            </a:solidFill>
+          </a:ln>
+        </p:spPr>
+        <p:style>
+          <a:lnRef idx="1">
+            <a:schemeClr val="accent1"/>
+          </a:lnRef>
+          <a:fillRef idx="0">
+            <a:schemeClr val="accent1"/>
+          </a:fillRef>
+          <a:effectRef idx="0">
+            <a:schemeClr val="accent1"/>
+          </a:effectRef>
+          <a:fontRef idx="minor">
+            <a:schemeClr val="tx1"/>
+          </a:fontRef>
+        </p:style>
+      </p:cxnSp>
+      <p:cxnSp>
+        <p:nvCxnSpPr>
+          <p:cNvPr id="32" name="Straight Connector 31">
+            <a:extLst>
+              <a:ext uri="{FF2B5EF4-FFF2-40B4-BE49-F238E27FC236}">
+                <a16:creationId xmlns:a16="http://schemas.microsoft.com/office/drawing/2014/main" id="{581C9D6D-7E97-3659-9736-E0DD6B53D598}"/>
+              </a:ext>
+            </a:extLst>
+          </p:cNvPr>
+          <p:cNvCxnSpPr>
+            <a:cxnSpLocks/>
+          </p:cNvCxnSpPr>
+          <p:nvPr/>
+        </p:nvCxnSpPr>
+        <p:spPr>
+          <a:xfrm>
+            <a:off x="195208" y="4905409"/>
+            <a:ext cx="6729689" cy="0"/>
+          </a:xfrm>
+          <a:prstGeom prst="line">
+            <a:avLst/>
+          </a:prstGeom>
+          <a:ln w="57150">
+            <a:solidFill>
+              <a:srgbClr val="FF0000"/>
+            </a:solidFill>
+          </a:ln>
+        </p:spPr>
+        <p:style>
+          <a:lnRef idx="1">
+            <a:schemeClr val="accent1"/>
+          </a:lnRef>
+          <a:fillRef idx="0">
+            <a:schemeClr val="accent1"/>
+          </a:fillRef>
+          <a:effectRef idx="0">
+            <a:schemeClr val="accent1"/>
+          </a:effectRef>
+          <a:fontRef idx="minor">
+            <a:schemeClr val="tx1"/>
+          </a:fontRef>
+        </p:style>
+      </p:cxnSp>
+      <p:cxnSp>
+        <p:nvCxnSpPr>
+          <p:cNvPr id="34" name="Straight Connector 33">
+            <a:extLst>
+              <a:ext uri="{FF2B5EF4-FFF2-40B4-BE49-F238E27FC236}">
+                <a16:creationId xmlns:a16="http://schemas.microsoft.com/office/drawing/2014/main" id="{F832A475-DC92-07B4-B70C-C701414B1762}"/>
+              </a:ext>
+            </a:extLst>
+          </p:cNvPr>
+          <p:cNvCxnSpPr>
+            <a:cxnSpLocks/>
+          </p:cNvCxnSpPr>
+          <p:nvPr/>
+        </p:nvCxnSpPr>
+        <p:spPr>
+          <a:xfrm>
+            <a:off x="174205" y="5261556"/>
+            <a:ext cx="4296195" cy="0"/>
+          </a:xfrm>
+          <a:prstGeom prst="line">
+            <a:avLst/>
+          </a:prstGeom>
+          <a:ln w="57150">
+            <a:solidFill>
+              <a:srgbClr val="FF0000"/>
+            </a:solidFill>
+          </a:ln>
+        </p:spPr>
+        <p:style>
+          <a:lnRef idx="1">
+            <a:schemeClr val="accent1"/>
+          </a:lnRef>
+          <a:fillRef idx="0">
+            <a:schemeClr val="accent1"/>
+          </a:fillRef>
+          <a:effectRef idx="0">
+            <a:schemeClr val="accent1"/>
+          </a:effectRef>
+          <a:fontRef idx="minor">
+            <a:schemeClr val="tx1"/>
+          </a:fontRef>
+        </p:style>
+      </p:cxnSp>
+    </p:spTree>
+    <p:extLst>
+      <p:ext uri="{BB962C8B-B14F-4D97-AF65-F5344CB8AC3E}">
+        <p14:creationId xmlns:p14="http://schemas.microsoft.com/office/powerpoint/2010/main" val="2021459348"/>
+      </p:ext>
+    </p:extLst>
+  </p:cSld>
+  <p:clrMapOvr>
+    <a:masterClrMapping/>
+  </p:clrMapOvr>
+</p:sld>
+</file>
+
+<file path=ppt/slides/slide21.xml><?xml version="1.0" encoding="utf-8"?>
+<p:sld xmlns:a="http://schemas.openxmlformats.org/drawingml/2006/main" xmlns:r="http://schemas.openxmlformats.org/officeDocument/2006/relationships" xmlns:p="http://schemas.openxmlformats.org/presentationml/2006/main">
+  <p:cSld>
+    <p:spTree>
+      <p:nvGrpSpPr>
+        <p:cNvPr id="1" name="">
+          <a:extLst>
+            <a:ext uri="{FF2B5EF4-FFF2-40B4-BE49-F238E27FC236}">
               <a16:creationId xmlns:a16="http://schemas.microsoft.com/office/drawing/2014/main" id="{A7A704A2-A135-C0B3-2800-9DB05691FF09}"/>
             </a:ext>
           </a:extLst>
@@ -9631,7 +9890,7 @@
 </p:sld>
 </file>
 
-<file path=ppt/slides/slide21.xml><?xml version="1.0" encoding="utf-8"?>
+<file path=ppt/slides/slide22.xml><?xml version="1.0" encoding="utf-8"?>
 <p:sld xmlns:a="http://schemas.openxmlformats.org/drawingml/2006/main" xmlns:r="http://schemas.openxmlformats.org/officeDocument/2006/relationships" xmlns:p="http://schemas.openxmlformats.org/presentationml/2006/main">
   <p:cSld>
     <p:spTree>
@@ -10185,7 +10444,7 @@
 </p:sld>
 </file>
 
-<file path=ppt/slides/slide22.xml><?xml version="1.0" encoding="utf-8"?>
+<file path=ppt/slides/slide23.xml><?xml version="1.0" encoding="utf-8"?>
 <p:sld xmlns:a="http://schemas.openxmlformats.org/drawingml/2006/main" xmlns:r="http://schemas.openxmlformats.org/officeDocument/2006/relationships" xmlns:p="http://schemas.openxmlformats.org/presentationml/2006/main">
   <p:cSld>
     <p:spTree>
@@ -10378,7 +10637,7 @@
 </p:sld>
 </file>
 
-<file path=ppt/slides/slide23.xml><?xml version="1.0" encoding="utf-8"?>
+<file path=ppt/slides/slide24.xml><?xml version="1.0" encoding="utf-8"?>
 <p:sld xmlns:a="http://schemas.openxmlformats.org/drawingml/2006/main" xmlns:r="http://schemas.openxmlformats.org/officeDocument/2006/relationships" xmlns:p="http://schemas.openxmlformats.org/presentationml/2006/main">
   <p:cSld>
     <p:spTree>
@@ -10674,7 +10933,7 @@
 </p:sld>
 </file>
 
-<file path=ppt/slides/slide24.xml><?xml version="1.0" encoding="utf-8"?>
+<file path=ppt/slides/slide25.xml><?xml version="1.0" encoding="utf-8"?>
 <p:sld xmlns:a="http://schemas.openxmlformats.org/drawingml/2006/main" xmlns:r="http://schemas.openxmlformats.org/officeDocument/2006/relationships" xmlns:p="http://schemas.openxmlformats.org/presentationml/2006/main">
   <p:cSld>
     <p:spTree>
@@ -10972,7 +11231,7 @@
 </p:sld>
 </file>
 
-<file path=ppt/slides/slide25.xml><?xml version="1.0" encoding="utf-8"?>
+<file path=ppt/slides/slide26.xml><?xml version="1.0" encoding="utf-8"?>
 <p:sld xmlns:a="http://schemas.openxmlformats.org/drawingml/2006/main" xmlns:r="http://schemas.openxmlformats.org/officeDocument/2006/relationships" xmlns:p="http://schemas.openxmlformats.org/presentationml/2006/main">
   <p:cSld>
     <p:spTree>
@@ -11313,7 +11572,7 @@
 </p:sld>
 </file>
 
-<file path=ppt/slides/slide26.xml><?xml version="1.0" encoding="utf-8"?>
+<file path=ppt/slides/slide27.xml><?xml version="1.0" encoding="utf-8"?>
 <p:sld xmlns:a="http://schemas.openxmlformats.org/drawingml/2006/main" xmlns:r="http://schemas.openxmlformats.org/officeDocument/2006/relationships" xmlns:p="http://schemas.openxmlformats.org/presentationml/2006/main">
   <p:cSld>
     <p:spTree>
@@ -11770,7 +12029,7 @@
 </p:sld>
 </file>
 
-<file path=ppt/slides/slide27.xml><?xml version="1.0" encoding="utf-8"?>
+<file path=ppt/slides/slide28.xml><?xml version="1.0" encoding="utf-8"?>
 <p:sld xmlns:a="http://schemas.openxmlformats.org/drawingml/2006/main" xmlns:r="http://schemas.openxmlformats.org/officeDocument/2006/relationships" xmlns:p="http://schemas.openxmlformats.org/presentationml/2006/main">
   <p:cSld>
     <p:spTree>
@@ -12270,7 +12529,7 @@
 </p:sld>
 </file>
 
-<file path=ppt/slides/slide28.xml><?xml version="1.0" encoding="utf-8"?>
+<file path=ppt/slides/slide29.xml><?xml version="1.0" encoding="utf-8"?>
 <p:sld xmlns:a="http://schemas.openxmlformats.org/drawingml/2006/main" xmlns:r="http://schemas.openxmlformats.org/officeDocument/2006/relationships" xmlns:p="http://schemas.openxmlformats.org/presentationml/2006/main">
   <p:cSld>
     <p:spTree>
@@ -12955,145 +13214,6 @@
     <p:extLst>
       <p:ext uri="{BB962C8B-B14F-4D97-AF65-F5344CB8AC3E}">
         <p14:creationId xmlns:p14="http://schemas.microsoft.com/office/powerpoint/2010/main" val="2384037264"/>
-      </p:ext>
-    </p:extLst>
-  </p:cSld>
-  <p:clrMapOvr>
-    <a:masterClrMapping/>
-  </p:clrMapOvr>
-</p:sld>
-</file>
-
-<file path=ppt/slides/slide29.xml><?xml version="1.0" encoding="utf-8"?>
-<p:sld xmlns:a="http://schemas.openxmlformats.org/drawingml/2006/main" xmlns:r="http://schemas.openxmlformats.org/officeDocument/2006/relationships" xmlns:p="http://schemas.openxmlformats.org/presentationml/2006/main">
-  <p:cSld>
-    <p:spTree>
-      <p:nvGrpSpPr>
-        <p:cNvPr id="1" name="">
-          <a:extLst>
-            <a:ext uri="{FF2B5EF4-FFF2-40B4-BE49-F238E27FC236}">
-              <a16:creationId xmlns:a16="http://schemas.microsoft.com/office/drawing/2014/main" id="{35663025-3116-E1F4-667B-86F3FEEA0572}"/>
-            </a:ext>
-          </a:extLst>
-        </p:cNvPr>
-        <p:cNvGrpSpPr/>
-        <p:nvPr/>
-      </p:nvGrpSpPr>
-      <p:grpSpPr>
-        <a:xfrm>
-          <a:off x="0" y="0"/>
-          <a:ext cx="0" cy="0"/>
-          <a:chOff x="0" y="0"/>
-          <a:chExt cx="0" cy="0"/>
-        </a:xfrm>
-      </p:grpSpPr>
-      <p:pic>
-        <p:nvPicPr>
-          <p:cNvPr id="5" name="Picture 4">
-            <a:extLst>
-              <a:ext uri="{FF2B5EF4-FFF2-40B4-BE49-F238E27FC236}">
-                <a16:creationId xmlns:a16="http://schemas.microsoft.com/office/drawing/2014/main" id="{8DCBD6BF-5973-9627-6171-A730F6294BC8}"/>
-              </a:ext>
-            </a:extLst>
-          </p:cNvPr>
-          <p:cNvPicPr>
-            <a:picLocks noChangeAspect="1"/>
-          </p:cNvPicPr>
-          <p:nvPr/>
-        </p:nvPicPr>
-        <p:blipFill>
-          <a:blip r:embed="rId2"/>
-          <a:stretch>
-            <a:fillRect/>
-          </a:stretch>
-        </p:blipFill>
-        <p:spPr>
-          <a:xfrm>
-            <a:off x="0" y="0"/>
-            <a:ext cx="5526531" cy="1244193"/>
-          </a:xfrm>
-          <a:prstGeom prst="rect">
-            <a:avLst/>
-          </a:prstGeom>
-        </p:spPr>
-      </p:pic>
-      <p:pic>
-        <p:nvPicPr>
-          <p:cNvPr id="6" name="Picture 5">
-            <a:extLst>
-              <a:ext uri="{FF2B5EF4-FFF2-40B4-BE49-F238E27FC236}">
-                <a16:creationId xmlns:a16="http://schemas.microsoft.com/office/drawing/2014/main" id="{908379AE-D309-835B-6303-F23662D33CB1}"/>
-              </a:ext>
-            </a:extLst>
-          </p:cNvPr>
-          <p:cNvPicPr>
-            <a:picLocks noChangeAspect="1"/>
-          </p:cNvPicPr>
-          <p:nvPr/>
-        </p:nvPicPr>
-        <p:blipFill>
-          <a:blip r:embed="rId3"/>
-          <a:stretch>
-            <a:fillRect/>
-          </a:stretch>
-        </p:blipFill>
-        <p:spPr>
-          <a:xfrm>
-            <a:off x="515423" y="3185175"/>
-            <a:ext cx="11473377" cy="866776"/>
-          </a:xfrm>
-          <a:prstGeom prst="rect">
-            <a:avLst/>
-          </a:prstGeom>
-        </p:spPr>
-      </p:pic>
-      <p:cxnSp>
-        <p:nvCxnSpPr>
-          <p:cNvPr id="8" name="Straight Connector 7">
-            <a:extLst>
-              <a:ext uri="{FF2B5EF4-FFF2-40B4-BE49-F238E27FC236}">
-                <a16:creationId xmlns:a16="http://schemas.microsoft.com/office/drawing/2014/main" id="{A1BB6339-D36E-CD9E-7336-D51FA4C6BADE}"/>
-              </a:ext>
-            </a:extLst>
-          </p:cNvPr>
-          <p:cNvCxnSpPr>
-            <a:cxnSpLocks/>
-          </p:cNvCxnSpPr>
-          <p:nvPr/>
-        </p:nvCxnSpPr>
-        <p:spPr>
-          <a:xfrm>
-            <a:off x="3098799" y="4013950"/>
-            <a:ext cx="4064001" cy="0"/>
-          </a:xfrm>
-          <a:prstGeom prst="line">
-            <a:avLst/>
-          </a:prstGeom>
-          <a:ln w="57150">
-            <a:solidFill>
-              <a:srgbClr val="FF0000"/>
-            </a:solidFill>
-          </a:ln>
-        </p:spPr>
-        <p:style>
-          <a:lnRef idx="1">
-            <a:schemeClr val="accent1"/>
-          </a:lnRef>
-          <a:fillRef idx="0">
-            <a:schemeClr val="accent1"/>
-          </a:fillRef>
-          <a:effectRef idx="0">
-            <a:schemeClr val="accent1"/>
-          </a:effectRef>
-          <a:fontRef idx="minor">
-            <a:schemeClr val="tx1"/>
-          </a:fontRef>
-        </p:style>
-      </p:cxnSp>
-    </p:spTree>
-    <p:extLst>
-      <p:ext uri="{BB962C8B-B14F-4D97-AF65-F5344CB8AC3E}">
-        <p14:creationId xmlns:p14="http://schemas.microsoft.com/office/powerpoint/2010/main" val="2755092042"/>
       </p:ext>
     </p:extLst>
   </p:cSld>
@@ -13431,6 +13551,145 @@
         <p:cNvPr id="1" name="">
           <a:extLst>
             <a:ext uri="{FF2B5EF4-FFF2-40B4-BE49-F238E27FC236}">
+              <a16:creationId xmlns:a16="http://schemas.microsoft.com/office/drawing/2014/main" id="{35663025-3116-E1F4-667B-86F3FEEA0572}"/>
+            </a:ext>
+          </a:extLst>
+        </p:cNvPr>
+        <p:cNvGrpSpPr/>
+        <p:nvPr/>
+      </p:nvGrpSpPr>
+      <p:grpSpPr>
+        <a:xfrm>
+          <a:off x="0" y="0"/>
+          <a:ext cx="0" cy="0"/>
+          <a:chOff x="0" y="0"/>
+          <a:chExt cx="0" cy="0"/>
+        </a:xfrm>
+      </p:grpSpPr>
+      <p:pic>
+        <p:nvPicPr>
+          <p:cNvPr id="5" name="Picture 4">
+            <a:extLst>
+              <a:ext uri="{FF2B5EF4-FFF2-40B4-BE49-F238E27FC236}">
+                <a16:creationId xmlns:a16="http://schemas.microsoft.com/office/drawing/2014/main" id="{8DCBD6BF-5973-9627-6171-A730F6294BC8}"/>
+              </a:ext>
+            </a:extLst>
+          </p:cNvPr>
+          <p:cNvPicPr>
+            <a:picLocks noChangeAspect="1"/>
+          </p:cNvPicPr>
+          <p:nvPr/>
+        </p:nvPicPr>
+        <p:blipFill>
+          <a:blip r:embed="rId2"/>
+          <a:stretch>
+            <a:fillRect/>
+          </a:stretch>
+        </p:blipFill>
+        <p:spPr>
+          <a:xfrm>
+            <a:off x="0" y="0"/>
+            <a:ext cx="5526531" cy="1244193"/>
+          </a:xfrm>
+          <a:prstGeom prst="rect">
+            <a:avLst/>
+          </a:prstGeom>
+        </p:spPr>
+      </p:pic>
+      <p:pic>
+        <p:nvPicPr>
+          <p:cNvPr id="6" name="Picture 5">
+            <a:extLst>
+              <a:ext uri="{FF2B5EF4-FFF2-40B4-BE49-F238E27FC236}">
+                <a16:creationId xmlns:a16="http://schemas.microsoft.com/office/drawing/2014/main" id="{908379AE-D309-835B-6303-F23662D33CB1}"/>
+              </a:ext>
+            </a:extLst>
+          </p:cNvPr>
+          <p:cNvPicPr>
+            <a:picLocks noChangeAspect="1"/>
+          </p:cNvPicPr>
+          <p:nvPr/>
+        </p:nvPicPr>
+        <p:blipFill>
+          <a:blip r:embed="rId3"/>
+          <a:stretch>
+            <a:fillRect/>
+          </a:stretch>
+        </p:blipFill>
+        <p:spPr>
+          <a:xfrm>
+            <a:off x="515423" y="3185175"/>
+            <a:ext cx="11473377" cy="866776"/>
+          </a:xfrm>
+          <a:prstGeom prst="rect">
+            <a:avLst/>
+          </a:prstGeom>
+        </p:spPr>
+      </p:pic>
+      <p:cxnSp>
+        <p:nvCxnSpPr>
+          <p:cNvPr id="8" name="Straight Connector 7">
+            <a:extLst>
+              <a:ext uri="{FF2B5EF4-FFF2-40B4-BE49-F238E27FC236}">
+                <a16:creationId xmlns:a16="http://schemas.microsoft.com/office/drawing/2014/main" id="{A1BB6339-D36E-CD9E-7336-D51FA4C6BADE}"/>
+              </a:ext>
+            </a:extLst>
+          </p:cNvPr>
+          <p:cNvCxnSpPr>
+            <a:cxnSpLocks/>
+          </p:cNvCxnSpPr>
+          <p:nvPr/>
+        </p:nvCxnSpPr>
+        <p:spPr>
+          <a:xfrm>
+            <a:off x="3098799" y="4013950"/>
+            <a:ext cx="4064001" cy="0"/>
+          </a:xfrm>
+          <a:prstGeom prst="line">
+            <a:avLst/>
+          </a:prstGeom>
+          <a:ln w="57150">
+            <a:solidFill>
+              <a:srgbClr val="FF0000"/>
+            </a:solidFill>
+          </a:ln>
+        </p:spPr>
+        <p:style>
+          <a:lnRef idx="1">
+            <a:schemeClr val="accent1"/>
+          </a:lnRef>
+          <a:fillRef idx="0">
+            <a:schemeClr val="accent1"/>
+          </a:fillRef>
+          <a:effectRef idx="0">
+            <a:schemeClr val="accent1"/>
+          </a:effectRef>
+          <a:fontRef idx="minor">
+            <a:schemeClr val="tx1"/>
+          </a:fontRef>
+        </p:style>
+      </p:cxnSp>
+    </p:spTree>
+    <p:extLst>
+      <p:ext uri="{BB962C8B-B14F-4D97-AF65-F5344CB8AC3E}">
+        <p14:creationId xmlns:p14="http://schemas.microsoft.com/office/powerpoint/2010/main" val="2755092042"/>
+      </p:ext>
+    </p:extLst>
+  </p:cSld>
+  <p:clrMapOvr>
+    <a:masterClrMapping/>
+  </p:clrMapOvr>
+</p:sld>
+</file>
+
+<file path=ppt/slides/slide31.xml><?xml version="1.0" encoding="utf-8"?>
+<p:sld xmlns:a="http://schemas.openxmlformats.org/drawingml/2006/main" xmlns:r="http://schemas.openxmlformats.org/officeDocument/2006/relationships" xmlns:p="http://schemas.openxmlformats.org/presentationml/2006/main">
+  <p:cSld>
+    <p:spTree>
+      <p:nvGrpSpPr>
+        <p:cNvPr id="1" name="">
+          <a:extLst>
+            <a:ext uri="{FF2B5EF4-FFF2-40B4-BE49-F238E27FC236}">
               <a16:creationId xmlns:a16="http://schemas.microsoft.com/office/drawing/2014/main" id="{CADC1F59-4AFF-17D7-9156-59B864329C78}"/>
             </a:ext>
           </a:extLst>
@@ -13953,7 +14212,7 @@
 </p:sld>
 </file>
 
-<file path=ppt/slides/slide31.xml><?xml version="1.0" encoding="utf-8"?>
+<file path=ppt/slides/slide32.xml><?xml version="1.0" encoding="utf-8"?>
 <p:sld xmlns:a="http://schemas.openxmlformats.org/drawingml/2006/main" xmlns:r="http://schemas.openxmlformats.org/officeDocument/2006/relationships" xmlns:p="http://schemas.openxmlformats.org/presentationml/2006/main">
   <p:cSld>
     <p:spTree>
@@ -14466,7 +14725,7 @@
 </p:sld>
 </file>
 
-<file path=ppt/slides/slide32.xml><?xml version="1.0" encoding="utf-8"?>
+<file path=ppt/slides/slide33.xml><?xml version="1.0" encoding="utf-8"?>
 <p:sld xmlns:a="http://schemas.openxmlformats.org/drawingml/2006/main" xmlns:r="http://schemas.openxmlformats.org/officeDocument/2006/relationships" xmlns:p="http://schemas.openxmlformats.org/presentationml/2006/main">
   <p:cSld>
     <p:spTree>
@@ -14807,7 +15066,7 @@
 </p:sld>
 </file>
 
-<file path=ppt/slides/slide33.xml><?xml version="1.0" encoding="utf-8"?>
+<file path=ppt/slides/slide34.xml><?xml version="1.0" encoding="utf-8"?>
 <p:sld xmlns:a="http://schemas.openxmlformats.org/drawingml/2006/main" xmlns:r="http://schemas.openxmlformats.org/officeDocument/2006/relationships" xmlns:p="http://schemas.openxmlformats.org/presentationml/2006/main">
   <p:cSld>
     <p:spTree>
@@ -15224,7 +15483,7 @@
 </p:sld>
 </file>
 
-<file path=ppt/slides/slide34.xml><?xml version="1.0" encoding="utf-8"?>
+<file path=ppt/slides/slide35.xml><?xml version="1.0" encoding="utf-8"?>
 <p:sld xmlns:a="http://schemas.openxmlformats.org/drawingml/2006/main" xmlns:r="http://schemas.openxmlformats.org/officeDocument/2006/relationships" xmlns:p="http://schemas.openxmlformats.org/presentationml/2006/main">
   <p:cSld>
     <p:spTree>
@@ -15593,7 +15852,7 @@
 </p:sld>
 </file>
 
-<file path=ppt/slides/slide35.xml><?xml version="1.0" encoding="utf-8"?>
+<file path=ppt/slides/slide36.xml><?xml version="1.0" encoding="utf-8"?>
 <p:sld xmlns:a="http://schemas.openxmlformats.org/drawingml/2006/main" xmlns:r="http://schemas.openxmlformats.org/officeDocument/2006/relationships" xmlns:p="http://schemas.openxmlformats.org/presentationml/2006/main">
   <p:cSld>
     <p:spTree>
@@ -15775,7 +16034,7 @@
 </p:sld>
 </file>
 
-<file path=ppt/slides/slide36.xml><?xml version="1.0" encoding="utf-8"?>
+<file path=ppt/slides/slide37.xml><?xml version="1.0" encoding="utf-8"?>
 <p:sld xmlns:a="http://schemas.openxmlformats.org/drawingml/2006/main" xmlns:r="http://schemas.openxmlformats.org/officeDocument/2006/relationships" xmlns:p="http://schemas.openxmlformats.org/presentationml/2006/main">
   <p:cSld>
     <p:spTree>
@@ -16202,7 +16461,7 @@
 </p:sld>
 </file>
 
-<file path=ppt/slides/slide37.xml><?xml version="1.0" encoding="utf-8"?>
+<file path=ppt/slides/slide38.xml><?xml version="1.0" encoding="utf-8"?>
 <p:sld xmlns:a="http://schemas.openxmlformats.org/drawingml/2006/main" xmlns:r="http://schemas.openxmlformats.org/officeDocument/2006/relationships" xmlns:p="http://schemas.openxmlformats.org/presentationml/2006/main">
   <p:cSld>
     <p:spTree>
@@ -16831,7 +17090,7 @@
 </p:sld>
 </file>
 
-<file path=ppt/slides/slide38.xml><?xml version="1.0" encoding="utf-8"?>
+<file path=ppt/slides/slide39.xml><?xml version="1.0" encoding="utf-8"?>
 <p:sld xmlns:a="http://schemas.openxmlformats.org/drawingml/2006/main" xmlns:r="http://schemas.openxmlformats.org/officeDocument/2006/relationships" xmlns:p="http://schemas.openxmlformats.org/presentationml/2006/main">
   <p:cSld>
     <p:spTree>
@@ -17077,562 +17336,6 @@
     <p:extLst>
       <p:ext uri="{BB962C8B-B14F-4D97-AF65-F5344CB8AC3E}">
         <p14:creationId xmlns:p14="http://schemas.microsoft.com/office/powerpoint/2010/main" val="4192701734"/>
-      </p:ext>
-    </p:extLst>
-  </p:cSld>
-  <p:clrMapOvr>
-    <a:masterClrMapping/>
-  </p:clrMapOvr>
-</p:sld>
-</file>
-
-<file path=ppt/slides/slide39.xml><?xml version="1.0" encoding="utf-8"?>
-<p:sld xmlns:a="http://schemas.openxmlformats.org/drawingml/2006/main" xmlns:r="http://schemas.openxmlformats.org/officeDocument/2006/relationships" xmlns:p="http://schemas.openxmlformats.org/presentationml/2006/main">
-  <p:cSld>
-    <p:spTree>
-      <p:nvGrpSpPr>
-        <p:cNvPr id="1" name="">
-          <a:extLst>
-            <a:ext uri="{FF2B5EF4-FFF2-40B4-BE49-F238E27FC236}">
-              <a16:creationId xmlns:a16="http://schemas.microsoft.com/office/drawing/2014/main" id="{8C1B04AA-86F6-532F-BD84-2D8C35FEE2F5}"/>
-            </a:ext>
-          </a:extLst>
-        </p:cNvPr>
-        <p:cNvGrpSpPr/>
-        <p:nvPr/>
-      </p:nvGrpSpPr>
-      <p:grpSpPr>
-        <a:xfrm>
-          <a:off x="0" y="0"/>
-          <a:ext cx="0" cy="0"/>
-          <a:chOff x="0" y="0"/>
-          <a:chExt cx="0" cy="0"/>
-        </a:xfrm>
-      </p:grpSpPr>
-      <p:pic>
-        <p:nvPicPr>
-          <p:cNvPr id="5" name="Picture 4">
-            <a:extLst>
-              <a:ext uri="{FF2B5EF4-FFF2-40B4-BE49-F238E27FC236}">
-                <a16:creationId xmlns:a16="http://schemas.microsoft.com/office/drawing/2014/main" id="{6C885697-68C6-F399-E896-B7C27993F653}"/>
-              </a:ext>
-            </a:extLst>
-          </p:cNvPr>
-          <p:cNvPicPr>
-            <a:picLocks noChangeAspect="1"/>
-          </p:cNvPicPr>
-          <p:nvPr/>
-        </p:nvPicPr>
-        <p:blipFill>
-          <a:blip r:embed="rId2"/>
-          <a:stretch>
-            <a:fillRect/>
-          </a:stretch>
-        </p:blipFill>
-        <p:spPr>
-          <a:xfrm>
-            <a:off x="0" y="0"/>
-            <a:ext cx="5526531" cy="1244193"/>
-          </a:xfrm>
-          <a:prstGeom prst="rect">
-            <a:avLst/>
-          </a:prstGeom>
-        </p:spPr>
-      </p:pic>
-      <p:pic>
-        <p:nvPicPr>
-          <p:cNvPr id="3" name="Picture 2">
-            <a:extLst>
-              <a:ext uri="{FF2B5EF4-FFF2-40B4-BE49-F238E27FC236}">
-                <a16:creationId xmlns:a16="http://schemas.microsoft.com/office/drawing/2014/main" id="{65B19B90-3A45-2017-9F11-2127C529E8BF}"/>
-              </a:ext>
-            </a:extLst>
-          </p:cNvPr>
-          <p:cNvPicPr>
-            <a:picLocks noChangeAspect="1"/>
-          </p:cNvPicPr>
-          <p:nvPr/>
-        </p:nvPicPr>
-        <p:blipFill>
-          <a:blip r:embed="rId3"/>
-          <a:stretch>
-            <a:fillRect/>
-          </a:stretch>
-        </p:blipFill>
-        <p:spPr>
-          <a:xfrm>
-            <a:off x="6218797" y="169333"/>
-            <a:ext cx="5785901" cy="681423"/>
-          </a:xfrm>
-          <a:prstGeom prst="rect">
-            <a:avLst/>
-          </a:prstGeom>
-        </p:spPr>
-      </p:pic>
-      <p:pic>
-        <p:nvPicPr>
-          <p:cNvPr id="6" name="Picture 5">
-            <a:extLst>
-              <a:ext uri="{FF2B5EF4-FFF2-40B4-BE49-F238E27FC236}">
-                <a16:creationId xmlns:a16="http://schemas.microsoft.com/office/drawing/2014/main" id="{BD15DC48-DEC1-1D95-5762-D9A2AF25E7E1}"/>
-              </a:ext>
-            </a:extLst>
-          </p:cNvPr>
-          <p:cNvPicPr>
-            <a:picLocks noChangeAspect="1"/>
-          </p:cNvPicPr>
-          <p:nvPr/>
-        </p:nvPicPr>
-        <p:blipFill>
-          <a:blip r:embed="rId4"/>
-          <a:stretch>
-            <a:fillRect/>
-          </a:stretch>
-        </p:blipFill>
-        <p:spPr>
-          <a:xfrm>
-            <a:off x="1492957" y="1497541"/>
-            <a:ext cx="8067147" cy="4966659"/>
-          </a:xfrm>
-          <a:prstGeom prst="rect">
-            <a:avLst/>
-          </a:prstGeom>
-        </p:spPr>
-      </p:pic>
-      <p:cxnSp>
-        <p:nvCxnSpPr>
-          <p:cNvPr id="7" name="Straight Connector 6">
-            <a:extLst>
-              <a:ext uri="{FF2B5EF4-FFF2-40B4-BE49-F238E27FC236}">
-                <a16:creationId xmlns:a16="http://schemas.microsoft.com/office/drawing/2014/main" id="{074A1E2C-6B01-D98B-F808-28C333E18B96}"/>
-              </a:ext>
-            </a:extLst>
-          </p:cNvPr>
-          <p:cNvCxnSpPr>
-            <a:cxnSpLocks/>
-          </p:cNvCxnSpPr>
-          <p:nvPr/>
-        </p:nvCxnSpPr>
-        <p:spPr>
-          <a:xfrm>
-            <a:off x="3132667" y="1837266"/>
-            <a:ext cx="6163733" cy="0"/>
-          </a:xfrm>
-          <a:prstGeom prst="line">
-            <a:avLst/>
-          </a:prstGeom>
-          <a:ln w="57150">
-            <a:solidFill>
-              <a:srgbClr val="FF0000"/>
-            </a:solidFill>
-          </a:ln>
-        </p:spPr>
-        <p:style>
-          <a:lnRef idx="1">
-            <a:schemeClr val="accent1"/>
-          </a:lnRef>
-          <a:fillRef idx="0">
-            <a:schemeClr val="accent1"/>
-          </a:fillRef>
-          <a:effectRef idx="0">
-            <a:schemeClr val="accent1"/>
-          </a:effectRef>
-          <a:fontRef idx="minor">
-            <a:schemeClr val="tx1"/>
-          </a:fontRef>
-        </p:style>
-      </p:cxnSp>
-      <p:cxnSp>
-        <p:nvCxnSpPr>
-          <p:cNvPr id="9" name="Straight Connector 8">
-            <a:extLst>
-              <a:ext uri="{FF2B5EF4-FFF2-40B4-BE49-F238E27FC236}">
-                <a16:creationId xmlns:a16="http://schemas.microsoft.com/office/drawing/2014/main" id="{05868C70-0ABF-0363-AA4E-375F8717231E}"/>
-              </a:ext>
-            </a:extLst>
-          </p:cNvPr>
-          <p:cNvCxnSpPr>
-            <a:cxnSpLocks/>
-          </p:cNvCxnSpPr>
-          <p:nvPr/>
-        </p:nvCxnSpPr>
-        <p:spPr>
-          <a:xfrm>
-            <a:off x="1659467" y="2192866"/>
-            <a:ext cx="7636933" cy="0"/>
-          </a:xfrm>
-          <a:prstGeom prst="line">
-            <a:avLst/>
-          </a:prstGeom>
-          <a:ln w="57150">
-            <a:solidFill>
-              <a:srgbClr val="FF0000"/>
-            </a:solidFill>
-          </a:ln>
-        </p:spPr>
-        <p:style>
-          <a:lnRef idx="1">
-            <a:schemeClr val="accent1"/>
-          </a:lnRef>
-          <a:fillRef idx="0">
-            <a:schemeClr val="accent1"/>
-          </a:fillRef>
-          <a:effectRef idx="0">
-            <a:schemeClr val="accent1"/>
-          </a:effectRef>
-          <a:fontRef idx="minor">
-            <a:schemeClr val="tx1"/>
-          </a:fontRef>
-        </p:style>
-      </p:cxnSp>
-      <p:cxnSp>
-        <p:nvCxnSpPr>
-          <p:cNvPr id="13" name="Straight Connector 12">
-            <a:extLst>
-              <a:ext uri="{FF2B5EF4-FFF2-40B4-BE49-F238E27FC236}">
-                <a16:creationId xmlns:a16="http://schemas.microsoft.com/office/drawing/2014/main" id="{B70C9E4B-BB71-9F33-094F-4441397AD08E}"/>
-              </a:ext>
-            </a:extLst>
-          </p:cNvPr>
-          <p:cNvCxnSpPr>
-            <a:cxnSpLocks/>
-          </p:cNvCxnSpPr>
-          <p:nvPr/>
-        </p:nvCxnSpPr>
-        <p:spPr>
-          <a:xfrm>
-            <a:off x="1659466" y="2565399"/>
-            <a:ext cx="7636933" cy="0"/>
-          </a:xfrm>
-          <a:prstGeom prst="line">
-            <a:avLst/>
-          </a:prstGeom>
-          <a:ln w="57150">
-            <a:solidFill>
-              <a:srgbClr val="FF0000"/>
-            </a:solidFill>
-          </a:ln>
-        </p:spPr>
-        <p:style>
-          <a:lnRef idx="1">
-            <a:schemeClr val="accent1"/>
-          </a:lnRef>
-          <a:fillRef idx="0">
-            <a:schemeClr val="accent1"/>
-          </a:fillRef>
-          <a:effectRef idx="0">
-            <a:schemeClr val="accent1"/>
-          </a:effectRef>
-          <a:fontRef idx="minor">
-            <a:schemeClr val="tx1"/>
-          </a:fontRef>
-        </p:style>
-      </p:cxnSp>
-      <p:cxnSp>
-        <p:nvCxnSpPr>
-          <p:cNvPr id="14" name="Straight Connector 13">
-            <a:extLst>
-              <a:ext uri="{FF2B5EF4-FFF2-40B4-BE49-F238E27FC236}">
-                <a16:creationId xmlns:a16="http://schemas.microsoft.com/office/drawing/2014/main" id="{8E6327AC-8A01-F125-FA57-F4606FC242C9}"/>
-              </a:ext>
-            </a:extLst>
-          </p:cNvPr>
-          <p:cNvCxnSpPr>
-            <a:cxnSpLocks/>
-          </p:cNvCxnSpPr>
-          <p:nvPr/>
-        </p:nvCxnSpPr>
-        <p:spPr>
-          <a:xfrm>
-            <a:off x="1659465" y="2904066"/>
-            <a:ext cx="7636933" cy="0"/>
-          </a:xfrm>
-          <a:prstGeom prst="line">
-            <a:avLst/>
-          </a:prstGeom>
-          <a:ln w="57150">
-            <a:solidFill>
-              <a:srgbClr val="FF0000"/>
-            </a:solidFill>
-          </a:ln>
-        </p:spPr>
-        <p:style>
-          <a:lnRef idx="1">
-            <a:schemeClr val="accent1"/>
-          </a:lnRef>
-          <a:fillRef idx="0">
-            <a:schemeClr val="accent1"/>
-          </a:fillRef>
-          <a:effectRef idx="0">
-            <a:schemeClr val="accent1"/>
-          </a:effectRef>
-          <a:fontRef idx="minor">
-            <a:schemeClr val="tx1"/>
-          </a:fontRef>
-        </p:style>
-      </p:cxnSp>
-      <p:cxnSp>
-        <p:nvCxnSpPr>
-          <p:cNvPr id="15" name="Straight Connector 14">
-            <a:extLst>
-              <a:ext uri="{FF2B5EF4-FFF2-40B4-BE49-F238E27FC236}">
-                <a16:creationId xmlns:a16="http://schemas.microsoft.com/office/drawing/2014/main" id="{46B799E4-1F57-248A-924E-371D64BFA64B}"/>
-              </a:ext>
-            </a:extLst>
-          </p:cNvPr>
-          <p:cNvCxnSpPr>
-            <a:cxnSpLocks/>
-          </p:cNvCxnSpPr>
-          <p:nvPr/>
-        </p:nvCxnSpPr>
-        <p:spPr>
-          <a:xfrm>
-            <a:off x="1659465" y="3259666"/>
-            <a:ext cx="7636933" cy="0"/>
-          </a:xfrm>
-          <a:prstGeom prst="line">
-            <a:avLst/>
-          </a:prstGeom>
-          <a:ln w="57150">
-            <a:solidFill>
-              <a:srgbClr val="FF0000"/>
-            </a:solidFill>
-          </a:ln>
-        </p:spPr>
-        <p:style>
-          <a:lnRef idx="1">
-            <a:schemeClr val="accent1"/>
-          </a:lnRef>
-          <a:fillRef idx="0">
-            <a:schemeClr val="accent1"/>
-          </a:fillRef>
-          <a:effectRef idx="0">
-            <a:schemeClr val="accent1"/>
-          </a:effectRef>
-          <a:fontRef idx="minor">
-            <a:schemeClr val="tx1"/>
-          </a:fontRef>
-        </p:style>
-      </p:cxnSp>
-      <p:cxnSp>
-        <p:nvCxnSpPr>
-          <p:cNvPr id="16" name="Straight Connector 15">
-            <a:extLst>
-              <a:ext uri="{FF2B5EF4-FFF2-40B4-BE49-F238E27FC236}">
-                <a16:creationId xmlns:a16="http://schemas.microsoft.com/office/drawing/2014/main" id="{1FB28995-D375-5AC7-4296-A93AEEA828A0}"/>
-              </a:ext>
-            </a:extLst>
-          </p:cNvPr>
-          <p:cNvCxnSpPr>
-            <a:cxnSpLocks/>
-          </p:cNvCxnSpPr>
-          <p:nvPr/>
-        </p:nvCxnSpPr>
-        <p:spPr>
-          <a:xfrm>
-            <a:off x="1708063" y="3615266"/>
-            <a:ext cx="6403004" cy="0"/>
-          </a:xfrm>
-          <a:prstGeom prst="line">
-            <a:avLst/>
-          </a:prstGeom>
-          <a:ln w="57150">
-            <a:solidFill>
-              <a:srgbClr val="FF0000"/>
-            </a:solidFill>
-          </a:ln>
-        </p:spPr>
-        <p:style>
-          <a:lnRef idx="1">
-            <a:schemeClr val="accent1"/>
-          </a:lnRef>
-          <a:fillRef idx="0">
-            <a:schemeClr val="accent1"/>
-          </a:fillRef>
-          <a:effectRef idx="0">
-            <a:schemeClr val="accent1"/>
-          </a:effectRef>
-          <a:fontRef idx="minor">
-            <a:schemeClr val="tx1"/>
-          </a:fontRef>
-        </p:style>
-      </p:cxnSp>
-      <p:cxnSp>
-        <p:nvCxnSpPr>
-          <p:cNvPr id="18" name="Straight Connector 17">
-            <a:extLst>
-              <a:ext uri="{FF2B5EF4-FFF2-40B4-BE49-F238E27FC236}">
-                <a16:creationId xmlns:a16="http://schemas.microsoft.com/office/drawing/2014/main" id="{7752C1B4-E0F4-8842-9E07-8E156D402FEC}"/>
-              </a:ext>
-            </a:extLst>
-          </p:cNvPr>
-          <p:cNvCxnSpPr>
-            <a:cxnSpLocks/>
-          </p:cNvCxnSpPr>
-          <p:nvPr/>
-        </p:nvCxnSpPr>
-        <p:spPr>
-          <a:xfrm>
-            <a:off x="3928534" y="4292599"/>
-            <a:ext cx="4944533" cy="0"/>
-          </a:xfrm>
-          <a:prstGeom prst="line">
-            <a:avLst/>
-          </a:prstGeom>
-          <a:ln w="57150">
-            <a:solidFill>
-              <a:srgbClr val="FF0000"/>
-            </a:solidFill>
-          </a:ln>
-        </p:spPr>
-        <p:style>
-          <a:lnRef idx="1">
-            <a:schemeClr val="accent1"/>
-          </a:lnRef>
-          <a:fillRef idx="0">
-            <a:schemeClr val="accent1"/>
-          </a:fillRef>
-          <a:effectRef idx="0">
-            <a:schemeClr val="accent1"/>
-          </a:effectRef>
-          <a:fontRef idx="minor">
-            <a:schemeClr val="tx1"/>
-          </a:fontRef>
-        </p:style>
-      </p:cxnSp>
-      <p:cxnSp>
-        <p:nvCxnSpPr>
-          <p:cNvPr id="20" name="Straight Connector 19">
-            <a:extLst>
-              <a:ext uri="{FF2B5EF4-FFF2-40B4-BE49-F238E27FC236}">
-                <a16:creationId xmlns:a16="http://schemas.microsoft.com/office/drawing/2014/main" id="{D2EC2161-0A25-8721-6F46-8AFE03A7EBA2}"/>
-              </a:ext>
-            </a:extLst>
-          </p:cNvPr>
-          <p:cNvCxnSpPr>
-            <a:cxnSpLocks/>
-          </p:cNvCxnSpPr>
-          <p:nvPr/>
-        </p:nvCxnSpPr>
-        <p:spPr>
-          <a:xfrm>
-            <a:off x="7366000" y="5731932"/>
-            <a:ext cx="1930398" cy="0"/>
-          </a:xfrm>
-          <a:prstGeom prst="line">
-            <a:avLst/>
-          </a:prstGeom>
-          <a:ln w="57150">
-            <a:solidFill>
-              <a:srgbClr val="FF0000"/>
-            </a:solidFill>
-          </a:ln>
-        </p:spPr>
-        <p:style>
-          <a:lnRef idx="1">
-            <a:schemeClr val="accent1"/>
-          </a:lnRef>
-          <a:fillRef idx="0">
-            <a:schemeClr val="accent1"/>
-          </a:fillRef>
-          <a:effectRef idx="0">
-            <a:schemeClr val="accent1"/>
-          </a:effectRef>
-          <a:fontRef idx="minor">
-            <a:schemeClr val="tx1"/>
-          </a:fontRef>
-        </p:style>
-      </p:cxnSp>
-      <p:cxnSp>
-        <p:nvCxnSpPr>
-          <p:cNvPr id="22" name="Straight Connector 21">
-            <a:extLst>
-              <a:ext uri="{FF2B5EF4-FFF2-40B4-BE49-F238E27FC236}">
-                <a16:creationId xmlns:a16="http://schemas.microsoft.com/office/drawing/2014/main" id="{68918101-F959-525E-844D-9331FB2EAF91}"/>
-              </a:ext>
-            </a:extLst>
-          </p:cNvPr>
-          <p:cNvCxnSpPr>
-            <a:cxnSpLocks/>
-          </p:cNvCxnSpPr>
-          <p:nvPr/>
-        </p:nvCxnSpPr>
-        <p:spPr>
-          <a:xfrm>
-            <a:off x="1708063" y="6104465"/>
-            <a:ext cx="7588335" cy="0"/>
-          </a:xfrm>
-          <a:prstGeom prst="line">
-            <a:avLst/>
-          </a:prstGeom>
-          <a:ln w="57150">
-            <a:solidFill>
-              <a:srgbClr val="FF0000"/>
-            </a:solidFill>
-          </a:ln>
-        </p:spPr>
-        <p:style>
-          <a:lnRef idx="1">
-            <a:schemeClr val="accent1"/>
-          </a:lnRef>
-          <a:fillRef idx="0">
-            <a:schemeClr val="accent1"/>
-          </a:fillRef>
-          <a:effectRef idx="0">
-            <a:schemeClr val="accent1"/>
-          </a:effectRef>
-          <a:fontRef idx="minor">
-            <a:schemeClr val="tx1"/>
-          </a:fontRef>
-        </p:style>
-      </p:cxnSp>
-      <p:cxnSp>
-        <p:nvCxnSpPr>
-          <p:cNvPr id="24" name="Straight Connector 23">
-            <a:extLst>
-              <a:ext uri="{FF2B5EF4-FFF2-40B4-BE49-F238E27FC236}">
-                <a16:creationId xmlns:a16="http://schemas.microsoft.com/office/drawing/2014/main" id="{A1A5F7F3-633E-51AC-E434-6B7EE8D90E52}"/>
-              </a:ext>
-            </a:extLst>
-          </p:cNvPr>
-          <p:cNvCxnSpPr>
-            <a:cxnSpLocks/>
-          </p:cNvCxnSpPr>
-          <p:nvPr/>
-        </p:nvCxnSpPr>
-        <p:spPr>
-          <a:xfrm>
-            <a:off x="1732362" y="6464200"/>
-            <a:ext cx="4803905" cy="0"/>
-          </a:xfrm>
-          <a:prstGeom prst="line">
-            <a:avLst/>
-          </a:prstGeom>
-          <a:ln w="57150">
-            <a:solidFill>
-              <a:srgbClr val="FF0000"/>
-            </a:solidFill>
-          </a:ln>
-        </p:spPr>
-        <p:style>
-          <a:lnRef idx="1">
-            <a:schemeClr val="accent1"/>
-          </a:lnRef>
-          <a:fillRef idx="0">
-            <a:schemeClr val="accent1"/>
-          </a:fillRef>
-          <a:effectRef idx="0">
-            <a:schemeClr val="accent1"/>
-          </a:effectRef>
-          <a:fontRef idx="minor">
-            <a:schemeClr val="tx1"/>
-          </a:fontRef>
-        </p:style>
-      </p:cxnSp>
-    </p:spTree>
-    <p:extLst>
-      <p:ext uri="{BB962C8B-B14F-4D97-AF65-F5344CB8AC3E}">
-        <p14:creationId xmlns:p14="http://schemas.microsoft.com/office/powerpoint/2010/main" val="3529972473"/>
       </p:ext>
     </p:extLst>
   </p:cSld>
@@ -18138,6 +17841,562 @@
         <p:cNvPr id="1" name="">
           <a:extLst>
             <a:ext uri="{FF2B5EF4-FFF2-40B4-BE49-F238E27FC236}">
+              <a16:creationId xmlns:a16="http://schemas.microsoft.com/office/drawing/2014/main" id="{8C1B04AA-86F6-532F-BD84-2D8C35FEE2F5}"/>
+            </a:ext>
+          </a:extLst>
+        </p:cNvPr>
+        <p:cNvGrpSpPr/>
+        <p:nvPr/>
+      </p:nvGrpSpPr>
+      <p:grpSpPr>
+        <a:xfrm>
+          <a:off x="0" y="0"/>
+          <a:ext cx="0" cy="0"/>
+          <a:chOff x="0" y="0"/>
+          <a:chExt cx="0" cy="0"/>
+        </a:xfrm>
+      </p:grpSpPr>
+      <p:pic>
+        <p:nvPicPr>
+          <p:cNvPr id="5" name="Picture 4">
+            <a:extLst>
+              <a:ext uri="{FF2B5EF4-FFF2-40B4-BE49-F238E27FC236}">
+                <a16:creationId xmlns:a16="http://schemas.microsoft.com/office/drawing/2014/main" id="{6C885697-68C6-F399-E896-B7C27993F653}"/>
+              </a:ext>
+            </a:extLst>
+          </p:cNvPr>
+          <p:cNvPicPr>
+            <a:picLocks noChangeAspect="1"/>
+          </p:cNvPicPr>
+          <p:nvPr/>
+        </p:nvPicPr>
+        <p:blipFill>
+          <a:blip r:embed="rId2"/>
+          <a:stretch>
+            <a:fillRect/>
+          </a:stretch>
+        </p:blipFill>
+        <p:spPr>
+          <a:xfrm>
+            <a:off x="0" y="0"/>
+            <a:ext cx="5526531" cy="1244193"/>
+          </a:xfrm>
+          <a:prstGeom prst="rect">
+            <a:avLst/>
+          </a:prstGeom>
+        </p:spPr>
+      </p:pic>
+      <p:pic>
+        <p:nvPicPr>
+          <p:cNvPr id="3" name="Picture 2">
+            <a:extLst>
+              <a:ext uri="{FF2B5EF4-FFF2-40B4-BE49-F238E27FC236}">
+                <a16:creationId xmlns:a16="http://schemas.microsoft.com/office/drawing/2014/main" id="{65B19B90-3A45-2017-9F11-2127C529E8BF}"/>
+              </a:ext>
+            </a:extLst>
+          </p:cNvPr>
+          <p:cNvPicPr>
+            <a:picLocks noChangeAspect="1"/>
+          </p:cNvPicPr>
+          <p:nvPr/>
+        </p:nvPicPr>
+        <p:blipFill>
+          <a:blip r:embed="rId3"/>
+          <a:stretch>
+            <a:fillRect/>
+          </a:stretch>
+        </p:blipFill>
+        <p:spPr>
+          <a:xfrm>
+            <a:off x="6218797" y="169333"/>
+            <a:ext cx="5785901" cy="681423"/>
+          </a:xfrm>
+          <a:prstGeom prst="rect">
+            <a:avLst/>
+          </a:prstGeom>
+        </p:spPr>
+      </p:pic>
+      <p:pic>
+        <p:nvPicPr>
+          <p:cNvPr id="6" name="Picture 5">
+            <a:extLst>
+              <a:ext uri="{FF2B5EF4-FFF2-40B4-BE49-F238E27FC236}">
+                <a16:creationId xmlns:a16="http://schemas.microsoft.com/office/drawing/2014/main" id="{BD15DC48-DEC1-1D95-5762-D9A2AF25E7E1}"/>
+              </a:ext>
+            </a:extLst>
+          </p:cNvPr>
+          <p:cNvPicPr>
+            <a:picLocks noChangeAspect="1"/>
+          </p:cNvPicPr>
+          <p:nvPr/>
+        </p:nvPicPr>
+        <p:blipFill>
+          <a:blip r:embed="rId4"/>
+          <a:stretch>
+            <a:fillRect/>
+          </a:stretch>
+        </p:blipFill>
+        <p:spPr>
+          <a:xfrm>
+            <a:off x="1492957" y="1497541"/>
+            <a:ext cx="8067147" cy="4966659"/>
+          </a:xfrm>
+          <a:prstGeom prst="rect">
+            <a:avLst/>
+          </a:prstGeom>
+        </p:spPr>
+      </p:pic>
+      <p:cxnSp>
+        <p:nvCxnSpPr>
+          <p:cNvPr id="7" name="Straight Connector 6">
+            <a:extLst>
+              <a:ext uri="{FF2B5EF4-FFF2-40B4-BE49-F238E27FC236}">
+                <a16:creationId xmlns:a16="http://schemas.microsoft.com/office/drawing/2014/main" id="{074A1E2C-6B01-D98B-F808-28C333E18B96}"/>
+              </a:ext>
+            </a:extLst>
+          </p:cNvPr>
+          <p:cNvCxnSpPr>
+            <a:cxnSpLocks/>
+          </p:cNvCxnSpPr>
+          <p:nvPr/>
+        </p:nvCxnSpPr>
+        <p:spPr>
+          <a:xfrm>
+            <a:off x="3132667" y="1837266"/>
+            <a:ext cx="6163733" cy="0"/>
+          </a:xfrm>
+          <a:prstGeom prst="line">
+            <a:avLst/>
+          </a:prstGeom>
+          <a:ln w="57150">
+            <a:solidFill>
+              <a:srgbClr val="FF0000"/>
+            </a:solidFill>
+          </a:ln>
+        </p:spPr>
+        <p:style>
+          <a:lnRef idx="1">
+            <a:schemeClr val="accent1"/>
+          </a:lnRef>
+          <a:fillRef idx="0">
+            <a:schemeClr val="accent1"/>
+          </a:fillRef>
+          <a:effectRef idx="0">
+            <a:schemeClr val="accent1"/>
+          </a:effectRef>
+          <a:fontRef idx="minor">
+            <a:schemeClr val="tx1"/>
+          </a:fontRef>
+        </p:style>
+      </p:cxnSp>
+      <p:cxnSp>
+        <p:nvCxnSpPr>
+          <p:cNvPr id="9" name="Straight Connector 8">
+            <a:extLst>
+              <a:ext uri="{FF2B5EF4-FFF2-40B4-BE49-F238E27FC236}">
+                <a16:creationId xmlns:a16="http://schemas.microsoft.com/office/drawing/2014/main" id="{05868C70-0ABF-0363-AA4E-375F8717231E}"/>
+              </a:ext>
+            </a:extLst>
+          </p:cNvPr>
+          <p:cNvCxnSpPr>
+            <a:cxnSpLocks/>
+          </p:cNvCxnSpPr>
+          <p:nvPr/>
+        </p:nvCxnSpPr>
+        <p:spPr>
+          <a:xfrm>
+            <a:off x="1659467" y="2192866"/>
+            <a:ext cx="7636933" cy="0"/>
+          </a:xfrm>
+          <a:prstGeom prst="line">
+            <a:avLst/>
+          </a:prstGeom>
+          <a:ln w="57150">
+            <a:solidFill>
+              <a:srgbClr val="FF0000"/>
+            </a:solidFill>
+          </a:ln>
+        </p:spPr>
+        <p:style>
+          <a:lnRef idx="1">
+            <a:schemeClr val="accent1"/>
+          </a:lnRef>
+          <a:fillRef idx="0">
+            <a:schemeClr val="accent1"/>
+          </a:fillRef>
+          <a:effectRef idx="0">
+            <a:schemeClr val="accent1"/>
+          </a:effectRef>
+          <a:fontRef idx="minor">
+            <a:schemeClr val="tx1"/>
+          </a:fontRef>
+        </p:style>
+      </p:cxnSp>
+      <p:cxnSp>
+        <p:nvCxnSpPr>
+          <p:cNvPr id="13" name="Straight Connector 12">
+            <a:extLst>
+              <a:ext uri="{FF2B5EF4-FFF2-40B4-BE49-F238E27FC236}">
+                <a16:creationId xmlns:a16="http://schemas.microsoft.com/office/drawing/2014/main" id="{B70C9E4B-BB71-9F33-094F-4441397AD08E}"/>
+              </a:ext>
+            </a:extLst>
+          </p:cNvPr>
+          <p:cNvCxnSpPr>
+            <a:cxnSpLocks/>
+          </p:cNvCxnSpPr>
+          <p:nvPr/>
+        </p:nvCxnSpPr>
+        <p:spPr>
+          <a:xfrm>
+            <a:off x="1659466" y="2565399"/>
+            <a:ext cx="7636933" cy="0"/>
+          </a:xfrm>
+          <a:prstGeom prst="line">
+            <a:avLst/>
+          </a:prstGeom>
+          <a:ln w="57150">
+            <a:solidFill>
+              <a:srgbClr val="FF0000"/>
+            </a:solidFill>
+          </a:ln>
+        </p:spPr>
+        <p:style>
+          <a:lnRef idx="1">
+            <a:schemeClr val="accent1"/>
+          </a:lnRef>
+          <a:fillRef idx="0">
+            <a:schemeClr val="accent1"/>
+          </a:fillRef>
+          <a:effectRef idx="0">
+            <a:schemeClr val="accent1"/>
+          </a:effectRef>
+          <a:fontRef idx="minor">
+            <a:schemeClr val="tx1"/>
+          </a:fontRef>
+        </p:style>
+      </p:cxnSp>
+      <p:cxnSp>
+        <p:nvCxnSpPr>
+          <p:cNvPr id="14" name="Straight Connector 13">
+            <a:extLst>
+              <a:ext uri="{FF2B5EF4-FFF2-40B4-BE49-F238E27FC236}">
+                <a16:creationId xmlns:a16="http://schemas.microsoft.com/office/drawing/2014/main" id="{8E6327AC-8A01-F125-FA57-F4606FC242C9}"/>
+              </a:ext>
+            </a:extLst>
+          </p:cNvPr>
+          <p:cNvCxnSpPr>
+            <a:cxnSpLocks/>
+          </p:cNvCxnSpPr>
+          <p:nvPr/>
+        </p:nvCxnSpPr>
+        <p:spPr>
+          <a:xfrm>
+            <a:off x="1659465" y="2904066"/>
+            <a:ext cx="7636933" cy="0"/>
+          </a:xfrm>
+          <a:prstGeom prst="line">
+            <a:avLst/>
+          </a:prstGeom>
+          <a:ln w="57150">
+            <a:solidFill>
+              <a:srgbClr val="FF0000"/>
+            </a:solidFill>
+          </a:ln>
+        </p:spPr>
+        <p:style>
+          <a:lnRef idx="1">
+            <a:schemeClr val="accent1"/>
+          </a:lnRef>
+          <a:fillRef idx="0">
+            <a:schemeClr val="accent1"/>
+          </a:fillRef>
+          <a:effectRef idx="0">
+            <a:schemeClr val="accent1"/>
+          </a:effectRef>
+          <a:fontRef idx="minor">
+            <a:schemeClr val="tx1"/>
+          </a:fontRef>
+        </p:style>
+      </p:cxnSp>
+      <p:cxnSp>
+        <p:nvCxnSpPr>
+          <p:cNvPr id="15" name="Straight Connector 14">
+            <a:extLst>
+              <a:ext uri="{FF2B5EF4-FFF2-40B4-BE49-F238E27FC236}">
+                <a16:creationId xmlns:a16="http://schemas.microsoft.com/office/drawing/2014/main" id="{46B799E4-1F57-248A-924E-371D64BFA64B}"/>
+              </a:ext>
+            </a:extLst>
+          </p:cNvPr>
+          <p:cNvCxnSpPr>
+            <a:cxnSpLocks/>
+          </p:cNvCxnSpPr>
+          <p:nvPr/>
+        </p:nvCxnSpPr>
+        <p:spPr>
+          <a:xfrm>
+            <a:off x="1659465" y="3259666"/>
+            <a:ext cx="7636933" cy="0"/>
+          </a:xfrm>
+          <a:prstGeom prst="line">
+            <a:avLst/>
+          </a:prstGeom>
+          <a:ln w="57150">
+            <a:solidFill>
+              <a:srgbClr val="FF0000"/>
+            </a:solidFill>
+          </a:ln>
+        </p:spPr>
+        <p:style>
+          <a:lnRef idx="1">
+            <a:schemeClr val="accent1"/>
+          </a:lnRef>
+          <a:fillRef idx="0">
+            <a:schemeClr val="accent1"/>
+          </a:fillRef>
+          <a:effectRef idx="0">
+            <a:schemeClr val="accent1"/>
+          </a:effectRef>
+          <a:fontRef idx="minor">
+            <a:schemeClr val="tx1"/>
+          </a:fontRef>
+        </p:style>
+      </p:cxnSp>
+      <p:cxnSp>
+        <p:nvCxnSpPr>
+          <p:cNvPr id="16" name="Straight Connector 15">
+            <a:extLst>
+              <a:ext uri="{FF2B5EF4-FFF2-40B4-BE49-F238E27FC236}">
+                <a16:creationId xmlns:a16="http://schemas.microsoft.com/office/drawing/2014/main" id="{1FB28995-D375-5AC7-4296-A93AEEA828A0}"/>
+              </a:ext>
+            </a:extLst>
+          </p:cNvPr>
+          <p:cNvCxnSpPr>
+            <a:cxnSpLocks/>
+          </p:cNvCxnSpPr>
+          <p:nvPr/>
+        </p:nvCxnSpPr>
+        <p:spPr>
+          <a:xfrm>
+            <a:off x="1708063" y="3615266"/>
+            <a:ext cx="6403004" cy="0"/>
+          </a:xfrm>
+          <a:prstGeom prst="line">
+            <a:avLst/>
+          </a:prstGeom>
+          <a:ln w="57150">
+            <a:solidFill>
+              <a:srgbClr val="FF0000"/>
+            </a:solidFill>
+          </a:ln>
+        </p:spPr>
+        <p:style>
+          <a:lnRef idx="1">
+            <a:schemeClr val="accent1"/>
+          </a:lnRef>
+          <a:fillRef idx="0">
+            <a:schemeClr val="accent1"/>
+          </a:fillRef>
+          <a:effectRef idx="0">
+            <a:schemeClr val="accent1"/>
+          </a:effectRef>
+          <a:fontRef idx="minor">
+            <a:schemeClr val="tx1"/>
+          </a:fontRef>
+        </p:style>
+      </p:cxnSp>
+      <p:cxnSp>
+        <p:nvCxnSpPr>
+          <p:cNvPr id="18" name="Straight Connector 17">
+            <a:extLst>
+              <a:ext uri="{FF2B5EF4-FFF2-40B4-BE49-F238E27FC236}">
+                <a16:creationId xmlns:a16="http://schemas.microsoft.com/office/drawing/2014/main" id="{7752C1B4-E0F4-8842-9E07-8E156D402FEC}"/>
+              </a:ext>
+            </a:extLst>
+          </p:cNvPr>
+          <p:cNvCxnSpPr>
+            <a:cxnSpLocks/>
+          </p:cNvCxnSpPr>
+          <p:nvPr/>
+        </p:nvCxnSpPr>
+        <p:spPr>
+          <a:xfrm>
+            <a:off x="3928534" y="4292599"/>
+            <a:ext cx="4944533" cy="0"/>
+          </a:xfrm>
+          <a:prstGeom prst="line">
+            <a:avLst/>
+          </a:prstGeom>
+          <a:ln w="57150">
+            <a:solidFill>
+              <a:srgbClr val="FF0000"/>
+            </a:solidFill>
+          </a:ln>
+        </p:spPr>
+        <p:style>
+          <a:lnRef idx="1">
+            <a:schemeClr val="accent1"/>
+          </a:lnRef>
+          <a:fillRef idx="0">
+            <a:schemeClr val="accent1"/>
+          </a:fillRef>
+          <a:effectRef idx="0">
+            <a:schemeClr val="accent1"/>
+          </a:effectRef>
+          <a:fontRef idx="minor">
+            <a:schemeClr val="tx1"/>
+          </a:fontRef>
+        </p:style>
+      </p:cxnSp>
+      <p:cxnSp>
+        <p:nvCxnSpPr>
+          <p:cNvPr id="20" name="Straight Connector 19">
+            <a:extLst>
+              <a:ext uri="{FF2B5EF4-FFF2-40B4-BE49-F238E27FC236}">
+                <a16:creationId xmlns:a16="http://schemas.microsoft.com/office/drawing/2014/main" id="{D2EC2161-0A25-8721-6F46-8AFE03A7EBA2}"/>
+              </a:ext>
+            </a:extLst>
+          </p:cNvPr>
+          <p:cNvCxnSpPr>
+            <a:cxnSpLocks/>
+          </p:cNvCxnSpPr>
+          <p:nvPr/>
+        </p:nvCxnSpPr>
+        <p:spPr>
+          <a:xfrm>
+            <a:off x="7366000" y="5731932"/>
+            <a:ext cx="1930398" cy="0"/>
+          </a:xfrm>
+          <a:prstGeom prst="line">
+            <a:avLst/>
+          </a:prstGeom>
+          <a:ln w="57150">
+            <a:solidFill>
+              <a:srgbClr val="FF0000"/>
+            </a:solidFill>
+          </a:ln>
+        </p:spPr>
+        <p:style>
+          <a:lnRef idx="1">
+            <a:schemeClr val="accent1"/>
+          </a:lnRef>
+          <a:fillRef idx="0">
+            <a:schemeClr val="accent1"/>
+          </a:fillRef>
+          <a:effectRef idx="0">
+            <a:schemeClr val="accent1"/>
+          </a:effectRef>
+          <a:fontRef idx="minor">
+            <a:schemeClr val="tx1"/>
+          </a:fontRef>
+        </p:style>
+      </p:cxnSp>
+      <p:cxnSp>
+        <p:nvCxnSpPr>
+          <p:cNvPr id="22" name="Straight Connector 21">
+            <a:extLst>
+              <a:ext uri="{FF2B5EF4-FFF2-40B4-BE49-F238E27FC236}">
+                <a16:creationId xmlns:a16="http://schemas.microsoft.com/office/drawing/2014/main" id="{68918101-F959-525E-844D-9331FB2EAF91}"/>
+              </a:ext>
+            </a:extLst>
+          </p:cNvPr>
+          <p:cNvCxnSpPr>
+            <a:cxnSpLocks/>
+          </p:cNvCxnSpPr>
+          <p:nvPr/>
+        </p:nvCxnSpPr>
+        <p:spPr>
+          <a:xfrm>
+            <a:off x="1708063" y="6104465"/>
+            <a:ext cx="7588335" cy="0"/>
+          </a:xfrm>
+          <a:prstGeom prst="line">
+            <a:avLst/>
+          </a:prstGeom>
+          <a:ln w="57150">
+            <a:solidFill>
+              <a:srgbClr val="FF0000"/>
+            </a:solidFill>
+          </a:ln>
+        </p:spPr>
+        <p:style>
+          <a:lnRef idx="1">
+            <a:schemeClr val="accent1"/>
+          </a:lnRef>
+          <a:fillRef idx="0">
+            <a:schemeClr val="accent1"/>
+          </a:fillRef>
+          <a:effectRef idx="0">
+            <a:schemeClr val="accent1"/>
+          </a:effectRef>
+          <a:fontRef idx="minor">
+            <a:schemeClr val="tx1"/>
+          </a:fontRef>
+        </p:style>
+      </p:cxnSp>
+      <p:cxnSp>
+        <p:nvCxnSpPr>
+          <p:cNvPr id="24" name="Straight Connector 23">
+            <a:extLst>
+              <a:ext uri="{FF2B5EF4-FFF2-40B4-BE49-F238E27FC236}">
+                <a16:creationId xmlns:a16="http://schemas.microsoft.com/office/drawing/2014/main" id="{A1A5F7F3-633E-51AC-E434-6B7EE8D90E52}"/>
+              </a:ext>
+            </a:extLst>
+          </p:cNvPr>
+          <p:cNvCxnSpPr>
+            <a:cxnSpLocks/>
+          </p:cNvCxnSpPr>
+          <p:nvPr/>
+        </p:nvCxnSpPr>
+        <p:spPr>
+          <a:xfrm>
+            <a:off x="1732362" y="6464200"/>
+            <a:ext cx="4803905" cy="0"/>
+          </a:xfrm>
+          <a:prstGeom prst="line">
+            <a:avLst/>
+          </a:prstGeom>
+          <a:ln w="57150">
+            <a:solidFill>
+              <a:srgbClr val="FF0000"/>
+            </a:solidFill>
+          </a:ln>
+        </p:spPr>
+        <p:style>
+          <a:lnRef idx="1">
+            <a:schemeClr val="accent1"/>
+          </a:lnRef>
+          <a:fillRef idx="0">
+            <a:schemeClr val="accent1"/>
+          </a:fillRef>
+          <a:effectRef idx="0">
+            <a:schemeClr val="accent1"/>
+          </a:effectRef>
+          <a:fontRef idx="minor">
+            <a:schemeClr val="tx1"/>
+          </a:fontRef>
+        </p:style>
+      </p:cxnSp>
+    </p:spTree>
+    <p:extLst>
+      <p:ext uri="{BB962C8B-B14F-4D97-AF65-F5344CB8AC3E}">
+        <p14:creationId xmlns:p14="http://schemas.microsoft.com/office/powerpoint/2010/main" val="3529972473"/>
+      </p:ext>
+    </p:extLst>
+  </p:cSld>
+  <p:clrMapOvr>
+    <a:masterClrMapping/>
+  </p:clrMapOvr>
+</p:sld>
+</file>
+
+<file path=ppt/slides/slide41.xml><?xml version="1.0" encoding="utf-8"?>
+<p:sld xmlns:a="http://schemas.openxmlformats.org/drawingml/2006/main" xmlns:r="http://schemas.openxmlformats.org/officeDocument/2006/relationships" xmlns:p="http://schemas.openxmlformats.org/presentationml/2006/main">
+  <p:cSld>
+    <p:spTree>
+      <p:nvGrpSpPr>
+        <p:cNvPr id="1" name="">
+          <a:extLst>
+            <a:ext uri="{FF2B5EF4-FFF2-40B4-BE49-F238E27FC236}">
               <a16:creationId xmlns:a16="http://schemas.microsoft.com/office/drawing/2014/main" id="{CC9B6C13-14AA-4427-E1A6-69A2B49D48BB}"/>
             </a:ext>
           </a:extLst>
@@ -18279,7 +18538,7 @@
 </p:sld>
 </file>
 
-<file path=ppt/slides/slide41.xml><?xml version="1.0" encoding="utf-8"?>
+<file path=ppt/slides/slide42.xml><?xml version="1.0" encoding="utf-8"?>
 <p:sld xmlns:a="http://schemas.openxmlformats.org/drawingml/2006/main" xmlns:r="http://schemas.openxmlformats.org/officeDocument/2006/relationships" xmlns:p="http://schemas.openxmlformats.org/presentationml/2006/main">
   <p:cSld>
     <p:spTree>
@@ -18375,7 +18634,7 @@
 </p:sld>
 </file>
 
-<file path=ppt/slides/slide42.xml><?xml version="1.0" encoding="utf-8"?>
+<file path=ppt/slides/slide43.xml><?xml version="1.0" encoding="utf-8"?>
 <p:sld xmlns:a="http://schemas.openxmlformats.org/drawingml/2006/main" xmlns:r="http://schemas.openxmlformats.org/officeDocument/2006/relationships" xmlns:p="http://schemas.openxmlformats.org/presentationml/2006/main">
   <p:cSld>
     <p:spTree>
@@ -18974,7 +19233,7 @@
 </p:sld>
 </file>
 
-<file path=ppt/slides/slide43.xml><?xml version="1.0" encoding="utf-8"?>
+<file path=ppt/slides/slide44.xml><?xml version="1.0" encoding="utf-8"?>
 <p:sld xmlns:a="http://schemas.openxmlformats.org/drawingml/2006/main" xmlns:r="http://schemas.openxmlformats.org/officeDocument/2006/relationships" xmlns:p="http://schemas.openxmlformats.org/presentationml/2006/main">
   <p:cSld>
     <p:spTree>
